--- a/assets/figures-editable/c3-c4/c4-e17.pptx
+++ b/assets/figures-editable/c3-c4/c4-e17.pptx
@@ -3104,8 +3104,8 @@
         </p:nvSpPr>
         <p:spPr>
           <a:xfrm>
-            <a:off x="274320" y="137160"/>
-            <a:ext cx="11612880" cy="365760"/>
+            <a:off x="274320" y="118872"/>
+            <a:ext cx="11612880" cy="340105"/>
           </a:xfrm>
           <a:prstGeom prst="rect">
             <a:avLst/>
@@ -3114,7 +3114,7 @@
           <a:effectLst/>
         </p:spPr>
         <p:txBody>
-          <a:bodyPr wrap="square" lIns="27432" rIns="27432" tIns="18288" bIns="18288" anchor="ctr">
+          <a:bodyPr wrap="none" lIns="18288" rIns="18288" tIns="18288" bIns="18288" anchor="t">
             <a:spAutoFit/>
           </a:bodyPr>
           <a:lstStyle/>
@@ -3125,7 +3125,7 @@
               </a:spcAft>
             </a:pPr>
             <a:r>
-              <a:rPr sz="2100" b="0" i="0">
+              <a:rPr sz="1900" b="1" i="0">
                 <a:solidFill>
                   <a:srgbClr val="8EDBD4"/>
                 </a:solidFill>
@@ -3144,13 +3144,13 @@
         </p:nvCxnSpPr>
         <p:spPr>
           <a:xfrm>
-            <a:off x="731520" y="2880360"/>
-            <a:ext cx="6675120" cy="0"/>
+            <a:off x="914400" y="4937760"/>
+            <a:ext cx="5669280" cy="0"/>
           </a:xfrm>
           <a:prstGeom prst="line">
             <a:avLst/>
           </a:prstGeom>
-          <a:ln w="25400">
+          <a:ln w="19050">
             <a:solidFill>
               <a:srgbClr val="B4C7D2"/>
             </a:solidFill>
@@ -3165,16 +3165,16 @@
           <p:nvPr/>
         </p:nvCxnSpPr>
         <p:spPr>
-          <a:xfrm flipV="1">
-            <a:off x="1005840" y="2876570"/>
-            <a:ext cx="76581" cy="3790"/>
+          <a:xfrm>
+            <a:off x="914400" y="1371600"/>
+            <a:ext cx="0" cy="3566160"/>
           </a:xfrm>
           <a:prstGeom prst="line">
             <a:avLst/>
           </a:prstGeom>
-          <a:ln w="25400">
+          <a:ln w="19050">
             <a:solidFill>
-              <a:srgbClr val="8EDBD4"/>
+              <a:srgbClr val="B4C7D2"/>
             </a:solidFill>
           </a:ln>
           <a:effectLst/>
@@ -3187,16 +3187,16 @@
           <p:nvPr/>
         </p:nvCxnSpPr>
         <p:spPr>
-          <a:xfrm flipV="1">
-            <a:off x="1082421" y="2865582"/>
-            <a:ext cx="76581" cy="10988"/>
+          <a:xfrm>
+            <a:off x="914400" y="4937760"/>
+            <a:ext cx="0" cy="64008"/>
           </a:xfrm>
           <a:prstGeom prst="line">
             <a:avLst/>
           </a:prstGeom>
-          <a:ln w="25400">
+          <a:ln w="12700">
             <a:solidFill>
-              <a:srgbClr val="8EDBD4"/>
+              <a:srgbClr val="B4C7D2"/>
             </a:solidFill>
           </a:ln>
           <a:effectLst/>
@@ -3209,43 +3209,61 @@
           <p:nvPr/>
         </p:nvCxnSpPr>
         <p:spPr>
-          <a:xfrm flipV="1">
-            <a:off x="1159002" y="2847958"/>
-            <a:ext cx="76581" cy="17624"/>
+          <a:xfrm>
+            <a:off x="914400" y="1371600"/>
+            <a:ext cx="0" cy="3566160"/>
           </a:xfrm>
           <a:prstGeom prst="line">
             <a:avLst/>
           </a:prstGeom>
-          <a:ln w="25400">
+          <a:ln w="7620">
             <a:solidFill>
-              <a:srgbClr val="8EDBD4"/>
+              <a:srgbClr val="2E4756"/>
             </a:solidFill>
           </a:ln>
           <a:effectLst/>
         </p:spPr>
       </p:cxnSp>
-      <p:cxnSp>
-        <p:nvCxnSpPr>
-          <p:cNvPr id="7" name="C4-E17 line 5" descr="sci-ppt:o005"/>
-          <p:cNvCxnSpPr/>
+      <p:sp>
+        <p:nvSpPr>
+          <p:cNvPr id="7" name="C4-E17 text 5" descr="sci-ppt:o005"/>
+          <p:cNvSpPr txBox="1"/>
           <p:nvPr/>
-        </p:nvCxnSpPr>
-        <p:spPr>
-          <a:xfrm flipV="1">
-            <a:off x="1235583" y="2824243"/>
-            <a:ext cx="76581" cy="23715"/>
-          </a:xfrm>
-          <a:prstGeom prst="line">
+        </p:nvSpPr>
+        <p:spPr>
+          <a:xfrm>
+            <a:off x="457200" y="5020056"/>
+            <a:ext cx="914400" cy="208407"/>
+          </a:xfrm>
+          <a:prstGeom prst="rect">
             <a:avLst/>
           </a:prstGeom>
-          <a:ln w="25400">
-            <a:solidFill>
-              <a:srgbClr val="8EDBD4"/>
-            </a:solidFill>
-          </a:ln>
+          <a:noFill/>
           <a:effectLst/>
         </p:spPr>
-      </p:cxnSp>
+        <p:txBody>
+          <a:bodyPr wrap="none" lIns="18288" rIns="18288" tIns="18288" bIns="18288" anchor="t">
+            <a:spAutoFit/>
+          </a:bodyPr>
+          <a:lstStyle/>
+          <a:p>
+            <a:pPr algn="ctr">
+              <a:spcAft>
+                <a:spcPts val="0"/>
+              </a:spcAft>
+            </a:pPr>
+            <a:r>
+              <a:rPr sz="1050" b="0" i="0">
+                <a:solidFill>
+                  <a:srgbClr val="B4C7D2"/>
+                </a:solidFill>
+                <a:latin typeface="Arial"/>
+              </a:rPr>
+              <a:t>0.00</a:t>
+            </a:r>
+          </a:p>
+        </p:txBody>
+      </p:sp>
       <p:cxnSp>
         <p:nvCxnSpPr>
           <p:cNvPr id="8" name="C4-E17 line 6" descr="sci-ppt:o006"/>
@@ -3253,16 +3271,16 @@
           <p:nvPr/>
         </p:nvCxnSpPr>
         <p:spPr>
-          <a:xfrm flipV="1">
-            <a:off x="1312164" y="2794969"/>
-            <a:ext cx="76581" cy="29274"/>
+          <a:xfrm>
+            <a:off x="2331720" y="4937760"/>
+            <a:ext cx="0" cy="64008"/>
           </a:xfrm>
           <a:prstGeom prst="line">
             <a:avLst/>
           </a:prstGeom>
-          <a:ln w="25400">
+          <a:ln w="12700">
             <a:solidFill>
-              <a:srgbClr val="8EDBD4"/>
+              <a:srgbClr val="B4C7D2"/>
             </a:solidFill>
           </a:ln>
           <a:effectLst/>
@@ -3275,43 +3293,61 @@
           <p:nvPr/>
         </p:nvCxnSpPr>
         <p:spPr>
-          <a:xfrm flipV="1">
-            <a:off x="1388745" y="2760655"/>
-            <a:ext cx="76581" cy="34314"/>
+          <a:xfrm>
+            <a:off x="2331720" y="1371600"/>
+            <a:ext cx="0" cy="3566160"/>
           </a:xfrm>
           <a:prstGeom prst="line">
             <a:avLst/>
           </a:prstGeom>
-          <a:ln w="25400">
+          <a:ln w="7620">
             <a:solidFill>
-              <a:srgbClr val="8EDBD4"/>
+              <a:srgbClr val="2E4756"/>
             </a:solidFill>
           </a:ln>
           <a:effectLst/>
         </p:spPr>
       </p:cxnSp>
-      <p:cxnSp>
-        <p:nvCxnSpPr>
-          <p:cNvPr id="10" name="C4-E17 line 8" descr="sci-ppt:o008"/>
-          <p:cNvCxnSpPr/>
+      <p:sp>
+        <p:nvSpPr>
+          <p:cNvPr id="10" name="C4-E17 text 8" descr="sci-ppt:o008"/>
+          <p:cNvSpPr txBox="1"/>
           <p:nvPr/>
-        </p:nvCxnSpPr>
-        <p:spPr>
-          <a:xfrm flipV="1">
-            <a:off x="1465326" y="2721802"/>
-            <a:ext cx="76581" cy="38853"/>
-          </a:xfrm>
-          <a:prstGeom prst="line">
+        </p:nvSpPr>
+        <p:spPr>
+          <a:xfrm>
+            <a:off x="1874519" y="5020056"/>
+            <a:ext cx="914400" cy="208407"/>
+          </a:xfrm>
+          <a:prstGeom prst="rect">
             <a:avLst/>
           </a:prstGeom>
-          <a:ln w="25400">
-            <a:solidFill>
-              <a:srgbClr val="8EDBD4"/>
-            </a:solidFill>
-          </a:ln>
+          <a:noFill/>
           <a:effectLst/>
         </p:spPr>
-      </p:cxnSp>
+        <p:txBody>
+          <a:bodyPr wrap="none" lIns="18288" rIns="18288" tIns="18288" bIns="18288" anchor="t">
+            <a:spAutoFit/>
+          </a:bodyPr>
+          <a:lstStyle/>
+          <a:p>
+            <a:pPr algn="ctr">
+              <a:spcAft>
+                <a:spcPts val="0"/>
+              </a:spcAft>
+            </a:pPr>
+            <a:r>
+              <a:rPr sz="1050" b="0" i="0">
+                <a:solidFill>
+                  <a:srgbClr val="B4C7D2"/>
+                </a:solidFill>
+                <a:latin typeface="Arial"/>
+              </a:rPr>
+              <a:t>0.25</a:t>
+            </a:r>
+          </a:p>
+        </p:txBody>
+      </p:sp>
       <p:cxnSp>
         <p:nvCxnSpPr>
           <p:cNvPr id="11" name="C4-E17 line 9" descr="sci-ppt:o009"/>
@@ -3319,16 +3355,16 @@
           <p:nvPr/>
         </p:nvCxnSpPr>
         <p:spPr>
-          <a:xfrm flipV="1">
-            <a:off x="1541907" y="2678899"/>
-            <a:ext cx="76581" cy="42903"/>
+          <a:xfrm>
+            <a:off x="3749039" y="4937760"/>
+            <a:ext cx="0" cy="64008"/>
           </a:xfrm>
           <a:prstGeom prst="line">
             <a:avLst/>
           </a:prstGeom>
-          <a:ln w="25400">
+          <a:ln w="12700">
             <a:solidFill>
-              <a:srgbClr val="8EDBD4"/>
+              <a:srgbClr val="B4C7D2"/>
             </a:solidFill>
           </a:ln>
           <a:effectLst/>
@@ -3341,43 +3377,61 @@
           <p:nvPr/>
         </p:nvCxnSpPr>
         <p:spPr>
-          <a:xfrm flipV="1">
-            <a:off x="1618488" y="2632419"/>
-            <a:ext cx="76581" cy="46480"/>
+          <a:xfrm>
+            <a:off x="3749039" y="1371600"/>
+            <a:ext cx="0" cy="3566160"/>
           </a:xfrm>
           <a:prstGeom prst="line">
             <a:avLst/>
           </a:prstGeom>
-          <a:ln w="25400">
+          <a:ln w="7620">
             <a:solidFill>
-              <a:srgbClr val="8EDBD4"/>
+              <a:srgbClr val="2E4756"/>
             </a:solidFill>
           </a:ln>
           <a:effectLst/>
         </p:spPr>
       </p:cxnSp>
-      <p:cxnSp>
-        <p:nvCxnSpPr>
-          <p:cNvPr id="13" name="C4-E17 line 11" descr="sci-ppt:o011"/>
-          <p:cNvCxnSpPr/>
+      <p:sp>
+        <p:nvSpPr>
+          <p:cNvPr id="13" name="C4-E17 text 11" descr="sci-ppt:o011"/>
+          <p:cNvSpPr txBox="1"/>
           <p:nvPr/>
-        </p:nvCxnSpPr>
-        <p:spPr>
-          <a:xfrm flipV="1">
-            <a:off x="1695069" y="2582822"/>
-            <a:ext cx="76581" cy="49597"/>
-          </a:xfrm>
-          <a:prstGeom prst="line">
+        </p:nvSpPr>
+        <p:spPr>
+          <a:xfrm>
+            <a:off x="3291839" y="5020056"/>
+            <a:ext cx="914400" cy="208407"/>
+          </a:xfrm>
+          <a:prstGeom prst="rect">
             <a:avLst/>
           </a:prstGeom>
-          <a:ln w="25400">
-            <a:solidFill>
-              <a:srgbClr val="8EDBD4"/>
-            </a:solidFill>
-          </a:ln>
+          <a:noFill/>
           <a:effectLst/>
         </p:spPr>
-      </p:cxnSp>
+        <p:txBody>
+          <a:bodyPr wrap="none" lIns="18288" rIns="18288" tIns="18288" bIns="18288" anchor="t">
+            <a:spAutoFit/>
+          </a:bodyPr>
+          <a:lstStyle/>
+          <a:p>
+            <a:pPr algn="ctr">
+              <a:spcAft>
+                <a:spcPts val="0"/>
+              </a:spcAft>
+            </a:pPr>
+            <a:r>
+              <a:rPr sz="1050" b="0" i="0">
+                <a:solidFill>
+                  <a:srgbClr val="B4C7D2"/>
+                </a:solidFill>
+                <a:latin typeface="Arial"/>
+              </a:rPr>
+              <a:t>0.50</a:t>
+            </a:r>
+          </a:p>
+        </p:txBody>
+      </p:sp>
       <p:cxnSp>
         <p:nvCxnSpPr>
           <p:cNvPr id="14" name="C4-E17 line 12" descr="sci-ppt:o012"/>
@@ -3385,16 +3439,16 @@
           <p:nvPr/>
         </p:nvCxnSpPr>
         <p:spPr>
-          <a:xfrm flipV="1">
-            <a:off x="1771650" y="2530552"/>
-            <a:ext cx="76581" cy="52270"/>
+          <a:xfrm>
+            <a:off x="5166360" y="4937760"/>
+            <a:ext cx="0" cy="64008"/>
           </a:xfrm>
           <a:prstGeom prst="line">
             <a:avLst/>
           </a:prstGeom>
-          <a:ln w="25400">
+          <a:ln w="12700">
             <a:solidFill>
-              <a:srgbClr val="8EDBD4"/>
+              <a:srgbClr val="B4C7D2"/>
             </a:solidFill>
           </a:ln>
           <a:effectLst/>
@@ -3407,43 +3461,61 @@
           <p:nvPr/>
         </p:nvCxnSpPr>
         <p:spPr>
-          <a:xfrm flipV="1">
-            <a:off x="1848231" y="2476039"/>
-            <a:ext cx="76581" cy="54513"/>
+          <a:xfrm>
+            <a:off x="5166360" y="1371600"/>
+            <a:ext cx="0" cy="3566160"/>
           </a:xfrm>
           <a:prstGeom prst="line">
             <a:avLst/>
           </a:prstGeom>
-          <a:ln w="25400">
+          <a:ln w="7620">
             <a:solidFill>
-              <a:srgbClr val="8EDBD4"/>
+              <a:srgbClr val="2E4756"/>
             </a:solidFill>
           </a:ln>
           <a:effectLst/>
         </p:spPr>
       </p:cxnSp>
-      <p:cxnSp>
-        <p:nvCxnSpPr>
-          <p:cNvPr id="16" name="C4-E17 line 14" descr="sci-ppt:o014"/>
-          <p:cNvCxnSpPr/>
+      <p:sp>
+        <p:nvSpPr>
+          <p:cNvPr id="16" name="C4-E17 text 14" descr="sci-ppt:o014"/>
+          <p:cNvSpPr txBox="1"/>
           <p:nvPr/>
-        </p:nvCxnSpPr>
-        <p:spPr>
-          <a:xfrm flipV="1">
-            <a:off x="1924812" y="2419698"/>
-            <a:ext cx="76581" cy="56341"/>
-          </a:xfrm>
-          <a:prstGeom prst="line">
+        </p:nvSpPr>
+        <p:spPr>
+          <a:xfrm>
+            <a:off x="4709160" y="5020056"/>
+            <a:ext cx="914400" cy="208407"/>
+          </a:xfrm>
+          <a:prstGeom prst="rect">
             <a:avLst/>
           </a:prstGeom>
-          <a:ln w="25400">
-            <a:solidFill>
-              <a:srgbClr val="8EDBD4"/>
-            </a:solidFill>
-          </a:ln>
+          <a:noFill/>
           <a:effectLst/>
         </p:spPr>
-      </p:cxnSp>
+        <p:txBody>
+          <a:bodyPr wrap="none" lIns="18288" rIns="18288" tIns="18288" bIns="18288" anchor="t">
+            <a:spAutoFit/>
+          </a:bodyPr>
+          <a:lstStyle/>
+          <a:p>
+            <a:pPr algn="ctr">
+              <a:spcAft>
+                <a:spcPts val="0"/>
+              </a:spcAft>
+            </a:pPr>
+            <a:r>
+              <a:rPr sz="1050" b="0" i="0">
+                <a:solidFill>
+                  <a:srgbClr val="B4C7D2"/>
+                </a:solidFill>
+                <a:latin typeface="Arial"/>
+              </a:rPr>
+              <a:t>0.75</a:t>
+            </a:r>
+          </a:p>
+        </p:txBody>
+      </p:sp>
       <p:cxnSp>
         <p:nvCxnSpPr>
           <p:cNvPr id="17" name="C4-E17 line 15" descr="sci-ppt:o015"/>
@@ -3451,16 +3523,16 @@
           <p:nvPr/>
         </p:nvCxnSpPr>
         <p:spPr>
-          <a:xfrm flipV="1">
-            <a:off x="2001393" y="2361931"/>
-            <a:ext cx="76581" cy="57767"/>
+          <a:xfrm>
+            <a:off x="6583680" y="4937760"/>
+            <a:ext cx="0" cy="64008"/>
           </a:xfrm>
           <a:prstGeom prst="line">
             <a:avLst/>
           </a:prstGeom>
-          <a:ln w="25400">
+          <a:ln w="12700">
             <a:solidFill>
-              <a:srgbClr val="8EDBD4"/>
+              <a:srgbClr val="B4C7D2"/>
             </a:solidFill>
           </a:ln>
           <a:effectLst/>
@@ -3473,43 +3545,61 @@
           <p:nvPr/>
         </p:nvCxnSpPr>
         <p:spPr>
-          <a:xfrm flipV="1">
-            <a:off x="2077974" y="2303122"/>
-            <a:ext cx="76581" cy="58809"/>
+          <a:xfrm>
+            <a:off x="6583680" y="1371600"/>
+            <a:ext cx="0" cy="3566160"/>
           </a:xfrm>
           <a:prstGeom prst="line">
             <a:avLst/>
           </a:prstGeom>
-          <a:ln w="25400">
+          <a:ln w="7620">
             <a:solidFill>
-              <a:srgbClr val="8EDBD4"/>
+              <a:srgbClr val="2E4756"/>
             </a:solidFill>
           </a:ln>
           <a:effectLst/>
         </p:spPr>
       </p:cxnSp>
-      <p:cxnSp>
-        <p:nvCxnSpPr>
-          <p:cNvPr id="19" name="C4-E17 line 17" descr="sci-ppt:o017"/>
-          <p:cNvCxnSpPr/>
+      <p:sp>
+        <p:nvSpPr>
+          <p:cNvPr id="19" name="C4-E17 text 17" descr="sci-ppt:o017"/>
+          <p:cNvSpPr txBox="1"/>
           <p:nvPr/>
-        </p:nvCxnSpPr>
-        <p:spPr>
-          <a:xfrm flipV="1">
-            <a:off x="2154555" y="2243644"/>
-            <a:ext cx="76581" cy="59478"/>
-          </a:xfrm>
-          <a:prstGeom prst="line">
+        </p:nvSpPr>
+        <p:spPr>
+          <a:xfrm>
+            <a:off x="6126480" y="5020056"/>
+            <a:ext cx="914400" cy="208407"/>
+          </a:xfrm>
+          <a:prstGeom prst="rect">
             <a:avLst/>
           </a:prstGeom>
-          <a:ln w="25400">
-            <a:solidFill>
-              <a:srgbClr val="8EDBD4"/>
-            </a:solidFill>
-          </a:ln>
+          <a:noFill/>
           <a:effectLst/>
         </p:spPr>
-      </p:cxnSp>
+        <p:txBody>
+          <a:bodyPr wrap="none" lIns="18288" rIns="18288" tIns="18288" bIns="18288" anchor="t">
+            <a:spAutoFit/>
+          </a:bodyPr>
+          <a:lstStyle/>
+          <a:p>
+            <a:pPr algn="ctr">
+              <a:spcAft>
+                <a:spcPts val="0"/>
+              </a:spcAft>
+            </a:pPr>
+            <a:r>
+              <a:rPr sz="1050" b="0" i="0">
+                <a:solidFill>
+                  <a:srgbClr val="B4C7D2"/>
+                </a:solidFill>
+                <a:latin typeface="Arial"/>
+              </a:rPr>
+              <a:t>1.00</a:t>
+            </a:r>
+          </a:p>
+        </p:txBody>
+      </p:sp>
       <p:cxnSp>
         <p:nvCxnSpPr>
           <p:cNvPr id="20" name="C4-E17 line 18" descr="sci-ppt:o018"/>
@@ -3517,16 +3607,16 @@
           <p:nvPr/>
         </p:nvCxnSpPr>
         <p:spPr>
-          <a:xfrm flipV="1">
-            <a:off x="2231136" y="2183855"/>
-            <a:ext cx="76581" cy="59789"/>
+          <a:xfrm>
+            <a:off x="850392" y="4810397"/>
+            <a:ext cx="64008" cy="0"/>
           </a:xfrm>
           <a:prstGeom prst="line">
             <a:avLst/>
           </a:prstGeom>
-          <a:ln w="25400">
+          <a:ln w="12700">
             <a:solidFill>
-              <a:srgbClr val="8EDBD4"/>
+              <a:srgbClr val="B4C7D2"/>
             </a:solidFill>
           </a:ln>
           <a:effectLst/>
@@ -3539,43 +3629,61 @@
           <p:nvPr/>
         </p:nvCxnSpPr>
         <p:spPr>
-          <a:xfrm flipV="1">
-            <a:off x="2307717" y="2124095"/>
-            <a:ext cx="76581" cy="59760"/>
+          <a:xfrm>
+            <a:off x="914400" y="4810397"/>
+            <a:ext cx="5669280" cy="0"/>
           </a:xfrm>
           <a:prstGeom prst="line">
             <a:avLst/>
           </a:prstGeom>
-          <a:ln w="25400">
+          <a:ln w="7620">
             <a:solidFill>
-              <a:srgbClr val="8EDBD4"/>
+              <a:srgbClr val="2E4756"/>
             </a:solidFill>
           </a:ln>
           <a:effectLst/>
         </p:spPr>
       </p:cxnSp>
-      <p:cxnSp>
-        <p:nvCxnSpPr>
-          <p:cNvPr id="22" name="C4-E17 line 20" descr="sci-ppt:o020"/>
-          <p:cNvCxnSpPr/>
+      <p:sp>
+        <p:nvSpPr>
+          <p:cNvPr id="22" name="C4-E17 text 20" descr="sci-ppt:o020"/>
+          <p:cNvSpPr txBox="1"/>
           <p:nvPr/>
-        </p:nvCxnSpPr>
-        <p:spPr>
-          <a:xfrm flipV="1">
-            <a:off x="2384298" y="2064694"/>
-            <a:ext cx="76581" cy="59401"/>
-          </a:xfrm>
-          <a:prstGeom prst="line">
+        </p:nvSpPr>
+        <p:spPr>
+          <a:xfrm>
+            <a:off x="45720" y="4728101"/>
+            <a:ext cx="777240" cy="208407"/>
+          </a:xfrm>
+          <a:prstGeom prst="rect">
             <a:avLst/>
           </a:prstGeom>
-          <a:ln w="25400">
-            <a:solidFill>
-              <a:srgbClr val="8EDBD4"/>
-            </a:solidFill>
-          </a:ln>
+          <a:noFill/>
           <a:effectLst/>
         </p:spPr>
-      </p:cxnSp>
+        <p:txBody>
+          <a:bodyPr wrap="none" lIns="18288" rIns="18288" tIns="18288" bIns="18288" anchor="t">
+            <a:spAutoFit/>
+          </a:bodyPr>
+          <a:lstStyle/>
+          <a:p>
+            <a:pPr algn="r">
+              <a:spcAft>
+                <a:spcPts val="0"/>
+              </a:spcAft>
+            </a:pPr>
+            <a:r>
+              <a:rPr sz="1050" b="0" i="0">
+                <a:solidFill>
+                  <a:srgbClr val="B4C7D2"/>
+                </a:solidFill>
+                <a:latin typeface="Arial"/>
+              </a:rPr>
+              <a:t>-1.5</a:t>
+            </a:r>
+          </a:p>
+        </p:txBody>
+      </p:sp>
       <p:cxnSp>
         <p:nvCxnSpPr>
           <p:cNvPr id="23" name="C4-E17 line 21" descr="sci-ppt:o021"/>
@@ -3583,16 +3691,16 @@
           <p:nvPr/>
         </p:nvCxnSpPr>
         <p:spPr>
-          <a:xfrm flipV="1">
-            <a:off x="2460879" y="2005965"/>
-            <a:ext cx="76581" cy="58729"/>
+          <a:xfrm>
+            <a:off x="850392" y="4173582"/>
+            <a:ext cx="64008" cy="0"/>
           </a:xfrm>
           <a:prstGeom prst="line">
             <a:avLst/>
           </a:prstGeom>
-          <a:ln w="25400">
+          <a:ln w="12700">
             <a:solidFill>
-              <a:srgbClr val="8EDBD4"/>
+              <a:srgbClr val="B4C7D2"/>
             </a:solidFill>
           </a:ln>
           <a:effectLst/>
@@ -3605,43 +3713,61 @@
           <p:nvPr/>
         </p:nvCxnSpPr>
         <p:spPr>
-          <a:xfrm flipV="1">
-            <a:off x="2537460" y="1948205"/>
-            <a:ext cx="76581" cy="57760"/>
+          <a:xfrm>
+            <a:off x="914400" y="4173582"/>
+            <a:ext cx="5669280" cy="0"/>
           </a:xfrm>
           <a:prstGeom prst="line">
             <a:avLst/>
           </a:prstGeom>
-          <a:ln w="25400">
+          <a:ln w="7620">
             <a:solidFill>
-              <a:srgbClr val="8EDBD4"/>
+              <a:srgbClr val="2E4756"/>
             </a:solidFill>
           </a:ln>
           <a:effectLst/>
         </p:spPr>
       </p:cxnSp>
-      <p:cxnSp>
-        <p:nvCxnSpPr>
-          <p:cNvPr id="25" name="C4-E17 line 23" descr="sci-ppt:o023"/>
-          <p:cNvCxnSpPr/>
+      <p:sp>
+        <p:nvSpPr>
+          <p:cNvPr id="25" name="C4-E17 text 23" descr="sci-ppt:o023"/>
+          <p:cNvSpPr txBox="1"/>
           <p:nvPr/>
-        </p:nvCxnSpPr>
-        <p:spPr>
-          <a:xfrm flipV="1">
-            <a:off x="2614041" y="1891701"/>
-            <a:ext cx="76581" cy="56504"/>
-          </a:xfrm>
-          <a:prstGeom prst="line">
+        </p:nvSpPr>
+        <p:spPr>
+          <a:xfrm>
+            <a:off x="45720" y="4091286"/>
+            <a:ext cx="777240" cy="208407"/>
+          </a:xfrm>
+          <a:prstGeom prst="rect">
             <a:avLst/>
           </a:prstGeom>
-          <a:ln w="25400">
-            <a:solidFill>
-              <a:srgbClr val="8EDBD4"/>
-            </a:solidFill>
-          </a:ln>
+          <a:noFill/>
           <a:effectLst/>
         </p:spPr>
-      </p:cxnSp>
+        <p:txBody>
+          <a:bodyPr wrap="none" lIns="18288" rIns="18288" tIns="18288" bIns="18288" anchor="t">
+            <a:spAutoFit/>
+          </a:bodyPr>
+          <a:lstStyle/>
+          <a:p>
+            <a:pPr algn="r">
+              <a:spcAft>
+                <a:spcPts val="0"/>
+              </a:spcAft>
+            </a:pPr>
+            <a:r>
+              <a:rPr sz="1050" b="0" i="0">
+                <a:solidFill>
+                  <a:srgbClr val="B4C7D2"/>
+                </a:solidFill>
+                <a:latin typeface="Arial"/>
+              </a:rPr>
+              <a:t>-1</a:t>
+            </a:r>
+          </a:p>
+        </p:txBody>
+      </p:sp>
       <p:cxnSp>
         <p:nvCxnSpPr>
           <p:cNvPr id="26" name="C4-E17 line 24" descr="sci-ppt:o024"/>
@@ -3649,16 +3775,16 @@
           <p:nvPr/>
         </p:nvCxnSpPr>
         <p:spPr>
-          <a:xfrm flipV="1">
-            <a:off x="2690622" y="1836720"/>
-            <a:ext cx="76581" cy="54981"/>
+          <a:xfrm>
+            <a:off x="850392" y="3536768"/>
+            <a:ext cx="64008" cy="0"/>
           </a:xfrm>
           <a:prstGeom prst="line">
             <a:avLst/>
           </a:prstGeom>
-          <a:ln w="25400">
+          <a:ln w="12700">
             <a:solidFill>
-              <a:srgbClr val="8EDBD4"/>
+              <a:srgbClr val="B4C7D2"/>
             </a:solidFill>
           </a:ln>
           <a:effectLst/>
@@ -3671,43 +3797,61 @@
           <p:nvPr/>
         </p:nvCxnSpPr>
         <p:spPr>
-          <a:xfrm flipV="1">
-            <a:off x="2767203" y="1783518"/>
-            <a:ext cx="76581" cy="53202"/>
+          <a:xfrm>
+            <a:off x="914400" y="3536768"/>
+            <a:ext cx="5669280" cy="0"/>
           </a:xfrm>
           <a:prstGeom prst="line">
             <a:avLst/>
           </a:prstGeom>
-          <a:ln w="25400">
+          <a:ln w="7620">
             <a:solidFill>
-              <a:srgbClr val="8EDBD4"/>
+              <a:srgbClr val="2E4756"/>
             </a:solidFill>
           </a:ln>
           <a:effectLst/>
         </p:spPr>
       </p:cxnSp>
-      <p:cxnSp>
-        <p:nvCxnSpPr>
-          <p:cNvPr id="28" name="C4-E17 line 26" descr="sci-ppt:o026"/>
-          <p:cNvCxnSpPr/>
+      <p:sp>
+        <p:nvSpPr>
+          <p:cNvPr id="28" name="C4-E17 text 26" descr="sci-ppt:o026"/>
+          <p:cNvSpPr txBox="1"/>
           <p:nvPr/>
-        </p:nvCxnSpPr>
-        <p:spPr>
-          <a:xfrm flipV="1">
-            <a:off x="2843784" y="1732337"/>
-            <a:ext cx="76581" cy="51181"/>
-          </a:xfrm>
-          <a:prstGeom prst="line">
+        </p:nvSpPr>
+        <p:spPr>
+          <a:xfrm>
+            <a:off x="45720" y="3454472"/>
+            <a:ext cx="777240" cy="208407"/>
+          </a:xfrm>
+          <a:prstGeom prst="rect">
             <a:avLst/>
           </a:prstGeom>
-          <a:ln w="25400">
-            <a:solidFill>
-              <a:srgbClr val="8EDBD4"/>
-            </a:solidFill>
-          </a:ln>
+          <a:noFill/>
           <a:effectLst/>
         </p:spPr>
-      </p:cxnSp>
+        <p:txBody>
+          <a:bodyPr wrap="none" lIns="18288" rIns="18288" tIns="18288" bIns="18288" anchor="t">
+            <a:spAutoFit/>
+          </a:bodyPr>
+          <a:lstStyle/>
+          <a:p>
+            <a:pPr algn="r">
+              <a:spcAft>
+                <a:spcPts val="0"/>
+              </a:spcAft>
+            </a:pPr>
+            <a:r>
+              <a:rPr sz="1050" b="0" i="0">
+                <a:solidFill>
+                  <a:srgbClr val="B4C7D2"/>
+                </a:solidFill>
+                <a:latin typeface="Arial"/>
+              </a:rPr>
+              <a:t>-0.5</a:t>
+            </a:r>
+          </a:p>
+        </p:txBody>
+      </p:sp>
       <p:cxnSp>
         <p:nvCxnSpPr>
           <p:cNvPr id="29" name="C4-E17 line 27" descr="sci-ppt:o027"/>
@@ -3715,16 +3859,16 @@
           <p:nvPr/>
         </p:nvCxnSpPr>
         <p:spPr>
-          <a:xfrm flipV="1">
-            <a:off x="2920365" y="1683400"/>
-            <a:ext cx="76581" cy="48937"/>
+          <a:xfrm>
+            <a:off x="850392" y="2899954"/>
+            <a:ext cx="64008" cy="0"/>
           </a:xfrm>
           <a:prstGeom prst="line">
             <a:avLst/>
           </a:prstGeom>
-          <a:ln w="25400">
+          <a:ln w="12700">
             <a:solidFill>
-              <a:srgbClr val="8EDBD4"/>
+              <a:srgbClr val="B4C7D2"/>
             </a:solidFill>
           </a:ln>
           <a:effectLst/>
@@ -3737,43 +3881,61 @@
           <p:nvPr/>
         </p:nvCxnSpPr>
         <p:spPr>
-          <a:xfrm flipV="1">
-            <a:off x="2996946" y="1636921"/>
-            <a:ext cx="76581" cy="46479"/>
+          <a:xfrm>
+            <a:off x="914400" y="2899954"/>
+            <a:ext cx="5669280" cy="0"/>
           </a:xfrm>
           <a:prstGeom prst="line">
             <a:avLst/>
           </a:prstGeom>
-          <a:ln w="25400">
+          <a:ln w="7620">
             <a:solidFill>
-              <a:srgbClr val="8EDBD4"/>
+              <a:srgbClr val="2E4756"/>
             </a:solidFill>
           </a:ln>
           <a:effectLst/>
         </p:spPr>
       </p:cxnSp>
-      <p:cxnSp>
-        <p:nvCxnSpPr>
-          <p:cNvPr id="31" name="C4-E17 line 29" descr="sci-ppt:o029"/>
-          <p:cNvCxnSpPr/>
+      <p:sp>
+        <p:nvSpPr>
+          <p:cNvPr id="31" name="C4-E17 text 29" descr="sci-ppt:o029"/>
+          <p:cNvSpPr txBox="1"/>
           <p:nvPr/>
-        </p:nvCxnSpPr>
-        <p:spPr>
-          <a:xfrm flipV="1">
-            <a:off x="3073527" y="1593095"/>
-            <a:ext cx="76581" cy="43826"/>
-          </a:xfrm>
-          <a:prstGeom prst="line">
+        </p:nvSpPr>
+        <p:spPr>
+          <a:xfrm>
+            <a:off x="45720" y="2817658"/>
+            <a:ext cx="777240" cy="208407"/>
+          </a:xfrm>
+          <a:prstGeom prst="rect">
             <a:avLst/>
           </a:prstGeom>
-          <a:ln w="25400">
-            <a:solidFill>
-              <a:srgbClr val="8EDBD4"/>
-            </a:solidFill>
-          </a:ln>
+          <a:noFill/>
           <a:effectLst/>
         </p:spPr>
-      </p:cxnSp>
+        <p:txBody>
+          <a:bodyPr wrap="none" lIns="18288" rIns="18288" tIns="18288" bIns="18288" anchor="t">
+            <a:spAutoFit/>
+          </a:bodyPr>
+          <a:lstStyle/>
+          <a:p>
+            <a:pPr algn="r">
+              <a:spcAft>
+                <a:spcPts val="0"/>
+              </a:spcAft>
+            </a:pPr>
+            <a:r>
+              <a:rPr sz="1050" b="0" i="0">
+                <a:solidFill>
+                  <a:srgbClr val="B4C7D2"/>
+                </a:solidFill>
+                <a:latin typeface="Arial"/>
+              </a:rPr>
+              <a:t>0</a:t>
+            </a:r>
+          </a:p>
+        </p:txBody>
+      </p:sp>
       <p:cxnSp>
         <p:nvCxnSpPr>
           <p:cNvPr id="32" name="C4-E17 line 30" descr="sci-ppt:o030"/>
@@ -3781,16 +3943,16 @@
           <p:nvPr/>
         </p:nvCxnSpPr>
         <p:spPr>
-          <a:xfrm flipV="1">
-            <a:off x="3150108" y="1552104"/>
-            <a:ext cx="76581" cy="40991"/>
+          <a:xfrm>
+            <a:off x="850392" y="2263140"/>
+            <a:ext cx="64008" cy="0"/>
           </a:xfrm>
           <a:prstGeom prst="line">
             <a:avLst/>
           </a:prstGeom>
-          <a:ln w="25400">
+          <a:ln w="12700">
             <a:solidFill>
-              <a:srgbClr val="8EDBD4"/>
+              <a:srgbClr val="B4C7D2"/>
             </a:solidFill>
           </a:ln>
           <a:effectLst/>
@@ -3803,43 +3965,61 @@
           <p:nvPr/>
         </p:nvCxnSpPr>
         <p:spPr>
-          <a:xfrm flipV="1">
-            <a:off x="3226689" y="1514117"/>
-            <a:ext cx="76581" cy="37987"/>
+          <a:xfrm>
+            <a:off x="914400" y="2263140"/>
+            <a:ext cx="5669280" cy="0"/>
           </a:xfrm>
           <a:prstGeom prst="line">
             <a:avLst/>
           </a:prstGeom>
-          <a:ln w="25400">
+          <a:ln w="7620">
             <a:solidFill>
-              <a:srgbClr val="8EDBD4"/>
+              <a:srgbClr val="2E4756"/>
             </a:solidFill>
           </a:ln>
           <a:effectLst/>
         </p:spPr>
       </p:cxnSp>
-      <p:cxnSp>
-        <p:nvCxnSpPr>
-          <p:cNvPr id="34" name="C4-E17 line 32" descr="sci-ppt:o032"/>
-          <p:cNvCxnSpPr/>
+      <p:sp>
+        <p:nvSpPr>
+          <p:cNvPr id="34" name="C4-E17 text 32" descr="sci-ppt:o032"/>
+          <p:cNvSpPr txBox="1"/>
           <p:nvPr/>
-        </p:nvCxnSpPr>
-        <p:spPr>
-          <a:xfrm flipV="1">
-            <a:off x="3303270" y="1479287"/>
-            <a:ext cx="76581" cy="34830"/>
-          </a:xfrm>
-          <a:prstGeom prst="line">
+        </p:nvSpPr>
+        <p:spPr>
+          <a:xfrm>
+            <a:off x="45720" y="2180844"/>
+            <a:ext cx="777240" cy="208407"/>
+          </a:xfrm>
+          <a:prstGeom prst="rect">
             <a:avLst/>
           </a:prstGeom>
-          <a:ln w="25400">
-            <a:solidFill>
-              <a:srgbClr val="8EDBD4"/>
-            </a:solidFill>
-          </a:ln>
+          <a:noFill/>
           <a:effectLst/>
         </p:spPr>
-      </p:cxnSp>
+        <p:txBody>
+          <a:bodyPr wrap="none" lIns="18288" rIns="18288" tIns="18288" bIns="18288" anchor="t">
+            <a:spAutoFit/>
+          </a:bodyPr>
+          <a:lstStyle/>
+          <a:p>
+            <a:pPr algn="r">
+              <a:spcAft>
+                <a:spcPts val="0"/>
+              </a:spcAft>
+            </a:pPr>
+            <a:r>
+              <a:rPr sz="1050" b="0" i="0">
+                <a:solidFill>
+                  <a:srgbClr val="B4C7D2"/>
+                </a:solidFill>
+                <a:latin typeface="Arial"/>
+              </a:rPr>
+              <a:t>0.5</a:t>
+            </a:r>
+          </a:p>
+        </p:txBody>
+      </p:sp>
       <p:cxnSp>
         <p:nvCxnSpPr>
           <p:cNvPr id="35" name="C4-E17 line 33" descr="sci-ppt:o033"/>
@@ -3847,16 +4027,16 @@
           <p:nvPr/>
         </p:nvCxnSpPr>
         <p:spPr>
-          <a:xfrm flipV="1">
-            <a:off x="3379851" y="1447751"/>
-            <a:ext cx="76581" cy="31536"/>
+          <a:xfrm>
+            <a:off x="850392" y="1626325"/>
+            <a:ext cx="64008" cy="0"/>
           </a:xfrm>
           <a:prstGeom prst="line">
             <a:avLst/>
           </a:prstGeom>
-          <a:ln w="25400">
+          <a:ln w="12700">
             <a:solidFill>
-              <a:srgbClr val="8EDBD4"/>
+              <a:srgbClr val="B4C7D2"/>
             </a:solidFill>
           </a:ln>
           <a:effectLst/>
@@ -3869,1079 +4049,1537 @@
           <p:nvPr/>
         </p:nvCxnSpPr>
         <p:spPr>
-          <a:xfrm flipV="1">
-            <a:off x="3456432" y="1419633"/>
-            <a:ext cx="76581" cy="28118"/>
+          <a:xfrm>
+            <a:off x="914400" y="1626325"/>
+            <a:ext cx="5669280" cy="0"/>
           </a:xfrm>
           <a:prstGeom prst="line">
             <a:avLst/>
           </a:prstGeom>
-          <a:ln w="25400">
+          <a:ln w="7620">
+            <a:solidFill>
+              <a:srgbClr val="2E4756"/>
+            </a:solidFill>
+          </a:ln>
+          <a:effectLst/>
+        </p:spPr>
+      </p:cxnSp>
+      <p:sp>
+        <p:nvSpPr>
+          <p:cNvPr id="37" name="C4-E17 text 35" descr="sci-ppt:o035"/>
+          <p:cNvSpPr txBox="1"/>
+          <p:nvPr/>
+        </p:nvSpPr>
+        <p:spPr>
+          <a:xfrm>
+            <a:off x="45720" y="1544029"/>
+            <a:ext cx="777240" cy="208407"/>
+          </a:xfrm>
+          <a:prstGeom prst="rect">
+            <a:avLst/>
+          </a:prstGeom>
+          <a:noFill/>
+          <a:effectLst/>
+        </p:spPr>
+        <p:txBody>
+          <a:bodyPr wrap="none" lIns="18288" rIns="18288" tIns="18288" bIns="18288" anchor="t">
+            <a:spAutoFit/>
+          </a:bodyPr>
+          <a:lstStyle/>
+          <a:p>
+            <a:pPr algn="r">
+              <a:spcAft>
+                <a:spcPts val="0"/>
+              </a:spcAft>
+            </a:pPr>
+            <a:r>
+              <a:rPr sz="1050" b="0" i="0">
+                <a:solidFill>
+                  <a:srgbClr val="B4C7D2"/>
+                </a:solidFill>
+                <a:latin typeface="Arial"/>
+              </a:rPr>
+              <a:t>1</a:t>
+            </a:r>
+          </a:p>
+        </p:txBody>
+      </p:sp>
+      <p:sp>
+        <p:nvSpPr>
+          <p:cNvPr id="38" name="C4-E17 text 36" descr="sci-ppt:o036"/>
+          <p:cNvSpPr txBox="1"/>
+          <p:nvPr/>
+        </p:nvSpPr>
+        <p:spPr>
+          <a:xfrm>
+            <a:off x="914400" y="5221224"/>
+            <a:ext cx="5669280" cy="231648"/>
+          </a:xfrm>
+          <a:prstGeom prst="rect">
+            <a:avLst/>
+          </a:prstGeom>
+          <a:noFill/>
+          <a:effectLst/>
+        </p:spPr>
+        <p:txBody>
+          <a:bodyPr wrap="none" lIns="18288" rIns="18288" tIns="18288" bIns="18288" anchor="t">
+            <a:spAutoFit/>
+          </a:bodyPr>
+          <a:lstStyle/>
+          <a:p>
+            <a:pPr algn="ctr">
+              <a:spcAft>
+                <a:spcPts val="0"/>
+              </a:spcAft>
+            </a:pPr>
+            <a:r>
+              <a:rPr sz="1200" b="0" i="0">
+                <a:solidFill>
+                  <a:srgbClr val="E7F0F3"/>
+                </a:solidFill>
+                <a:latin typeface="Arial"/>
+              </a:rPr>
+              <a:t>r / b</a:t>
+            </a:r>
+          </a:p>
+        </p:txBody>
+      </p:sp>
+      <p:sp>
+        <p:nvSpPr>
+          <p:cNvPr id="39" name="C4-E17 text 37" descr="sci-ppt:o037"/>
+          <p:cNvSpPr txBox="1"/>
+          <p:nvPr/>
+        </p:nvSpPr>
+        <p:spPr>
+          <a:xfrm>
+            <a:off x="365760" y="1024128"/>
+            <a:ext cx="5669280" cy="231648"/>
+          </a:xfrm>
+          <a:prstGeom prst="rect">
+            <a:avLst/>
+          </a:prstGeom>
+          <a:noFill/>
+          <a:effectLst/>
+        </p:spPr>
+        <p:txBody>
+          <a:bodyPr wrap="none" lIns="18288" rIns="18288" tIns="18288" bIns="18288" anchor="t">
+            <a:spAutoFit/>
+          </a:bodyPr>
+          <a:lstStyle/>
+          <a:p>
+            <a:pPr algn="l">
+              <a:spcAft>
+                <a:spcPts val="0"/>
+              </a:spcAft>
+            </a:pPr>
+            <a:r>
+              <a:rPr sz="1200" b="0" i="0">
+                <a:solidFill>
+                  <a:srgbClr val="E7F0F3"/>
+                </a:solidFill>
+                <a:latin typeface="Arial"/>
+              </a:rPr>
+              <a:t>w/w(0)  and  w′ b/w(0)</a:t>
+            </a:r>
+          </a:p>
+        </p:txBody>
+      </p:sp>
+      <p:sp>
+        <p:nvSpPr>
+          <p:cNvPr id="40" name="C4-E17 polygon 38" descr="sci-ppt:o038"/>
+          <p:cNvSpPr/>
+          <p:nvPr/>
+        </p:nvSpPr>
+        <p:spPr>
+          <a:xfrm>
+            <a:off x="914400" y="1626325"/>
+            <a:ext cx="5669280" cy="1273629"/>
+          </a:xfrm>
+          <a:custGeom>
+            <a:avLst/>
+            <a:gdLst/>
+            <a:ahLst/>
+            <a:cxnLst/>
+            <a:rect l="l" t="t" r="r" b="b"/>
+            <a:pathLst>
+              <a:path w="5669280" h="1273629">
+                <a:moveTo>
+                  <a:pt x="0" y="0"/>
+                </a:moveTo>
+                <a:lnTo>
+                  <a:pt x="28488" y="65"/>
+                </a:lnTo>
+                <a:lnTo>
+                  <a:pt x="56977" y="257"/>
+                </a:lnTo>
+                <a:lnTo>
+                  <a:pt x="85466" y="579"/>
+                </a:lnTo>
+                <a:lnTo>
+                  <a:pt x="113955" y="1029"/>
+                </a:lnTo>
+                <a:lnTo>
+                  <a:pt x="142444" y="1608"/>
+                </a:lnTo>
+                <a:lnTo>
+                  <a:pt x="170933" y="2315"/>
+                </a:lnTo>
+                <a:lnTo>
+                  <a:pt x="199421" y="3150"/>
+                </a:lnTo>
+                <a:lnTo>
+                  <a:pt x="227910" y="4114"/>
+                </a:lnTo>
+                <a:lnTo>
+                  <a:pt x="256399" y="5205"/>
+                </a:lnTo>
+                <a:lnTo>
+                  <a:pt x="284888" y="6424"/>
+                </a:lnTo>
+                <a:lnTo>
+                  <a:pt x="313377" y="7771"/>
+                </a:lnTo>
+                <a:lnTo>
+                  <a:pt x="341866" y="9246"/>
+                </a:lnTo>
+                <a:lnTo>
+                  <a:pt x="370354" y="10848"/>
+                </a:lnTo>
+                <a:lnTo>
+                  <a:pt x="398843" y="12576"/>
+                </a:lnTo>
+                <a:lnTo>
+                  <a:pt x="427332" y="14432"/>
+                </a:lnTo>
+                <a:lnTo>
+                  <a:pt x="455821" y="16414"/>
+                </a:lnTo>
+                <a:lnTo>
+                  <a:pt x="484310" y="18522"/>
+                </a:lnTo>
+                <a:lnTo>
+                  <a:pt x="512799" y="20756"/>
+                </a:lnTo>
+                <a:lnTo>
+                  <a:pt x="541288" y="23115"/>
+                </a:lnTo>
+                <a:lnTo>
+                  <a:pt x="569776" y="25599"/>
+                </a:lnTo>
+                <a:lnTo>
+                  <a:pt x="598265" y="28209"/>
+                </a:lnTo>
+                <a:lnTo>
+                  <a:pt x="626754" y="30942"/>
+                </a:lnTo>
+                <a:lnTo>
+                  <a:pt x="655243" y="33800"/>
+                </a:lnTo>
+                <a:lnTo>
+                  <a:pt x="683732" y="36781"/>
+                </a:lnTo>
+                <a:lnTo>
+                  <a:pt x="712221" y="39885"/>
+                </a:lnTo>
+                <a:lnTo>
+                  <a:pt x="740709" y="43111"/>
+                </a:lnTo>
+                <a:lnTo>
+                  <a:pt x="769198" y="46460"/>
+                </a:lnTo>
+                <a:lnTo>
+                  <a:pt x="797687" y="49930"/>
+                </a:lnTo>
+                <a:lnTo>
+                  <a:pt x="826176" y="53521"/>
+                </a:lnTo>
+                <a:lnTo>
+                  <a:pt x="854665" y="57233"/>
+                </a:lnTo>
+                <a:lnTo>
+                  <a:pt x="883154" y="61065"/>
+                </a:lnTo>
+                <a:lnTo>
+                  <a:pt x="911643" y="65015"/>
+                </a:lnTo>
+                <a:lnTo>
+                  <a:pt x="940131" y="69085"/>
+                </a:lnTo>
+                <a:lnTo>
+                  <a:pt x="968620" y="73272"/>
+                </a:lnTo>
+                <a:lnTo>
+                  <a:pt x="997109" y="77577"/>
+                </a:lnTo>
+                <a:lnTo>
+                  <a:pt x="1025598" y="81999"/>
+                </a:lnTo>
+                <a:lnTo>
+                  <a:pt x="1054087" y="86536"/>
+                </a:lnTo>
+                <a:lnTo>
+                  <a:pt x="1082576" y="91189"/>
+                </a:lnTo>
+                <a:lnTo>
+                  <a:pt x="1111064" y="95957"/>
+                </a:lnTo>
+                <a:lnTo>
+                  <a:pt x="1139553" y="100838"/>
+                </a:lnTo>
+                <a:lnTo>
+                  <a:pt x="1168042" y="105832"/>
+                </a:lnTo>
+                <a:lnTo>
+                  <a:pt x="1196531" y="110939"/>
+                </a:lnTo>
+                <a:lnTo>
+                  <a:pt x="1225020" y="116157"/>
+                </a:lnTo>
+                <a:lnTo>
+                  <a:pt x="1253509" y="121486"/>
+                </a:lnTo>
+                <a:lnTo>
+                  <a:pt x="1281997" y="126924"/>
+                </a:lnTo>
+                <a:lnTo>
+                  <a:pt x="1310486" y="132471"/>
+                </a:lnTo>
+                <a:lnTo>
+                  <a:pt x="1338975" y="138127"/>
+                </a:lnTo>
+                <a:lnTo>
+                  <a:pt x="1367464" y="143889"/>
+                </a:lnTo>
+                <a:lnTo>
+                  <a:pt x="1395953" y="149758"/>
+                </a:lnTo>
+                <a:lnTo>
+                  <a:pt x="1424442" y="155732"/>
+                </a:lnTo>
+                <a:lnTo>
+                  <a:pt x="1452931" y="161810"/>
+                </a:lnTo>
+                <a:lnTo>
+                  <a:pt x="1481419" y="167992"/>
+                </a:lnTo>
+                <a:lnTo>
+                  <a:pt x="1509908" y="174275"/>
+                </a:lnTo>
+                <a:lnTo>
+                  <a:pt x="1538397" y="180661"/>
+                </a:lnTo>
+                <a:lnTo>
+                  <a:pt x="1566886" y="187146"/>
+                </a:lnTo>
+                <a:lnTo>
+                  <a:pt x="1595375" y="193730"/>
+                </a:lnTo>
+                <a:lnTo>
+                  <a:pt x="1623864" y="200413"/>
+                </a:lnTo>
+                <a:lnTo>
+                  <a:pt x="1652352" y="207192"/>
+                </a:lnTo>
+                <a:lnTo>
+                  <a:pt x="1680841" y="214068"/>
+                </a:lnTo>
+                <a:lnTo>
+                  <a:pt x="1709330" y="221038"/>
+                </a:lnTo>
+                <a:lnTo>
+                  <a:pt x="1737819" y="228102"/>
+                </a:lnTo>
+                <a:lnTo>
+                  <a:pt x="1766308" y="235258"/>
+                </a:lnTo>
+                <a:lnTo>
+                  <a:pt x="1794797" y="242505"/>
+                </a:lnTo>
+                <a:lnTo>
+                  <a:pt x="1823286" y="249842"/>
+                </a:lnTo>
+                <a:lnTo>
+                  <a:pt x="1851774" y="257268"/>
+                </a:lnTo>
+                <a:lnTo>
+                  <a:pt x="1880263" y="264781"/>
+                </a:lnTo>
+                <a:lnTo>
+                  <a:pt x="1908752" y="272381"/>
+                </a:lnTo>
+                <a:lnTo>
+                  <a:pt x="1937241" y="280065"/>
+                </a:lnTo>
+                <a:lnTo>
+                  <a:pt x="1965730" y="287833"/>
+                </a:lnTo>
+                <a:lnTo>
+                  <a:pt x="1994219" y="295684"/>
+                </a:lnTo>
+                <a:lnTo>
+                  <a:pt x="2022707" y="303615"/>
+                </a:lnTo>
+                <a:lnTo>
+                  <a:pt x="2051196" y="311626"/>
+                </a:lnTo>
+                <a:lnTo>
+                  <a:pt x="2079685" y="319714"/>
+                </a:lnTo>
+                <a:lnTo>
+                  <a:pt x="2108174" y="327880"/>
+                </a:lnTo>
+                <a:lnTo>
+                  <a:pt x="2136663" y="336121"/>
+                </a:lnTo>
+                <a:lnTo>
+                  <a:pt x="2165152" y="344435"/>
+                </a:lnTo>
+                <a:lnTo>
+                  <a:pt x="2193641" y="352822"/>
+                </a:lnTo>
+                <a:lnTo>
+                  <a:pt x="2222129" y="361280"/>
+                </a:lnTo>
+                <a:lnTo>
+                  <a:pt x="2250618" y="369807"/>
+                </a:lnTo>
+                <a:lnTo>
+                  <a:pt x="2279107" y="378403"/>
+                </a:lnTo>
+                <a:lnTo>
+                  <a:pt x="2307596" y="387064"/>
+                </a:lnTo>
+                <a:lnTo>
+                  <a:pt x="2336085" y="395790"/>
+                </a:lnTo>
+                <a:lnTo>
+                  <a:pt x="2364574" y="404579"/>
+                </a:lnTo>
+                <a:lnTo>
+                  <a:pt x="2393062" y="413430"/>
+                </a:lnTo>
+                <a:lnTo>
+                  <a:pt x="2421551" y="422340"/>
+                </a:lnTo>
+                <a:lnTo>
+                  <a:pt x="2450040" y="431309"/>
+                </a:lnTo>
+                <a:lnTo>
+                  <a:pt x="2478529" y="440334"/>
+                </a:lnTo>
+                <a:lnTo>
+                  <a:pt x="2507018" y="449414"/>
+                </a:lnTo>
+                <a:lnTo>
+                  <a:pt x="2535507" y="458548"/>
+                </a:lnTo>
+                <a:lnTo>
+                  <a:pt x="2563995" y="467732"/>
+                </a:lnTo>
+                <a:lnTo>
+                  <a:pt x="2592484" y="476967"/>
+                </a:lnTo>
+                <a:lnTo>
+                  <a:pt x="2620973" y="486249"/>
+                </a:lnTo>
+                <a:lnTo>
+                  <a:pt x="2649462" y="495578"/>
+                </a:lnTo>
+                <a:lnTo>
+                  <a:pt x="2677951" y="504951"/>
+                </a:lnTo>
+                <a:lnTo>
+                  <a:pt x="2706440" y="514367"/>
+                </a:lnTo>
+                <a:lnTo>
+                  <a:pt x="2734929" y="523823"/>
+                </a:lnTo>
+                <a:lnTo>
+                  <a:pt x="2763417" y="533318"/>
+                </a:lnTo>
+                <a:lnTo>
+                  <a:pt x="2791906" y="542850"/>
+                </a:lnTo>
+                <a:lnTo>
+                  <a:pt x="2820395" y="552417"/>
+                </a:lnTo>
+                <a:lnTo>
+                  <a:pt x="2848884" y="562017"/>
+                </a:lnTo>
+                <a:lnTo>
+                  <a:pt x="2877373" y="571648"/>
+                </a:lnTo>
+                <a:lnTo>
+                  <a:pt x="2905862" y="581309"/>
+                </a:lnTo>
+                <a:lnTo>
+                  <a:pt x="2934350" y="590996"/>
+                </a:lnTo>
+                <a:lnTo>
+                  <a:pt x="2962839" y="600710"/>
+                </a:lnTo>
+                <a:lnTo>
+                  <a:pt x="2991328" y="610446"/>
+                </a:lnTo>
+                <a:lnTo>
+                  <a:pt x="3019817" y="620203"/>
+                </a:lnTo>
+                <a:lnTo>
+                  <a:pt x="3048306" y="629980"/>
+                </a:lnTo>
+                <a:lnTo>
+                  <a:pt x="3076795" y="639774"/>
+                </a:lnTo>
+                <a:lnTo>
+                  <a:pt x="3105284" y="649582"/>
+                </a:lnTo>
+                <a:lnTo>
+                  <a:pt x="3133772" y="659404"/>
+                </a:lnTo>
+                <a:lnTo>
+                  <a:pt x="3162261" y="669236"/>
+                </a:lnTo>
+                <a:lnTo>
+                  <a:pt x="3190750" y="679077"/>
+                </a:lnTo>
+                <a:lnTo>
+                  <a:pt x="3219239" y="688924"/>
+                </a:lnTo>
+                <a:lnTo>
+                  <a:pt x="3247728" y="698776"/>
+                </a:lnTo>
+                <a:lnTo>
+                  <a:pt x="3276217" y="708629"/>
+                </a:lnTo>
+                <a:lnTo>
+                  <a:pt x="3304705" y="718482"/>
+                </a:lnTo>
+                <a:lnTo>
+                  <a:pt x="3333194" y="728333"/>
+                </a:lnTo>
+                <a:lnTo>
+                  <a:pt x="3361683" y="738179"/>
+                </a:lnTo>
+                <a:lnTo>
+                  <a:pt x="3390172" y="748017"/>
+                </a:lnTo>
+                <a:lnTo>
+                  <a:pt x="3418661" y="757847"/>
+                </a:lnTo>
+                <a:lnTo>
+                  <a:pt x="3447150" y="767665"/>
+                </a:lnTo>
+                <a:lnTo>
+                  <a:pt x="3475638" y="777468"/>
+                </a:lnTo>
+                <a:lnTo>
+                  <a:pt x="3504127" y="787256"/>
+                </a:lnTo>
+                <a:lnTo>
+                  <a:pt x="3532616" y="797024"/>
+                </a:lnTo>
+                <a:lnTo>
+                  <a:pt x="3561105" y="806772"/>
+                </a:lnTo>
+                <a:lnTo>
+                  <a:pt x="3589594" y="816495"/>
+                </a:lnTo>
+                <a:lnTo>
+                  <a:pt x="3618083" y="826193"/>
+                </a:lnTo>
+                <a:lnTo>
+                  <a:pt x="3646572" y="835862"/>
+                </a:lnTo>
+                <a:lnTo>
+                  <a:pt x="3675060" y="845500"/>
+                </a:lnTo>
+                <a:lnTo>
+                  <a:pt x="3703549" y="855105"/>
+                </a:lnTo>
+                <a:lnTo>
+                  <a:pt x="3732038" y="864673"/>
+                </a:lnTo>
+                <a:lnTo>
+                  <a:pt x="3760527" y="874203"/>
+                </a:lnTo>
+                <a:lnTo>
+                  <a:pt x="3789016" y="883692"/>
+                </a:lnTo>
+                <a:lnTo>
+                  <a:pt x="3817505" y="893137"/>
+                </a:lnTo>
+                <a:lnTo>
+                  <a:pt x="3845993" y="902535"/>
+                </a:lnTo>
+                <a:lnTo>
+                  <a:pt x="3874482" y="911885"/>
+                </a:lnTo>
+                <a:lnTo>
+                  <a:pt x="3902971" y="921183"/>
+                </a:lnTo>
+                <a:lnTo>
+                  <a:pt x="3931460" y="930427"/>
+                </a:lnTo>
+                <a:lnTo>
+                  <a:pt x="3959949" y="939613"/>
+                </a:lnTo>
+                <a:lnTo>
+                  <a:pt x="3988438" y="948741"/>
+                </a:lnTo>
+                <a:lnTo>
+                  <a:pt x="4016927" y="957805"/>
+                </a:lnTo>
+                <a:lnTo>
+                  <a:pt x="4045415" y="966805"/>
+                </a:lnTo>
+                <a:lnTo>
+                  <a:pt x="4073904" y="975737"/>
+                </a:lnTo>
+                <a:lnTo>
+                  <a:pt x="4102393" y="984598"/>
+                </a:lnTo>
+                <a:lnTo>
+                  <a:pt x="4130882" y="993386"/>
+                </a:lnTo>
+                <a:lnTo>
+                  <a:pt x="4159371" y="1002097"/>
+                </a:lnTo>
+                <a:lnTo>
+                  <a:pt x="4187860" y="1010730"/>
+                </a:lnTo>
+                <a:lnTo>
+                  <a:pt x="4216348" y="1019280"/>
+                </a:lnTo>
+                <a:lnTo>
+                  <a:pt x="4244837" y="1027746"/>
+                </a:lnTo>
+                <a:lnTo>
+                  <a:pt x="4273326" y="1036123"/>
+                </a:lnTo>
+                <a:lnTo>
+                  <a:pt x="4301815" y="1044411"/>
+                </a:lnTo>
+                <a:lnTo>
+                  <a:pt x="4330304" y="1052604"/>
+                </a:lnTo>
+                <a:lnTo>
+                  <a:pt x="4358793" y="1060701"/>
+                </a:lnTo>
+                <a:lnTo>
+                  <a:pt x="4387282" y="1068699"/>
+                </a:lnTo>
+                <a:lnTo>
+                  <a:pt x="4415770" y="1076594"/>
+                </a:lnTo>
+                <a:lnTo>
+                  <a:pt x="4444259" y="1084384"/>
+                </a:lnTo>
+                <a:lnTo>
+                  <a:pt x="4472748" y="1092065"/>
+                </a:lnTo>
+                <a:lnTo>
+                  <a:pt x="4501237" y="1099635"/>
+                </a:lnTo>
+                <a:lnTo>
+                  <a:pt x="4529726" y="1107090"/>
+                </a:lnTo>
+                <a:lnTo>
+                  <a:pt x="4558215" y="1114427"/>
+                </a:lnTo>
+                <a:lnTo>
+                  <a:pt x="4586703" y="1121643"/>
+                </a:lnTo>
+                <a:lnTo>
+                  <a:pt x="4615192" y="1128735"/>
+                </a:lnTo>
+                <a:lnTo>
+                  <a:pt x="4643681" y="1135701"/>
+                </a:lnTo>
+                <a:lnTo>
+                  <a:pt x="4672170" y="1142536"/>
+                </a:lnTo>
+                <a:lnTo>
+                  <a:pt x="4700659" y="1149237"/>
+                </a:lnTo>
+                <a:lnTo>
+                  <a:pt x="4729148" y="1155802"/>
+                </a:lnTo>
+                <a:lnTo>
+                  <a:pt x="4757636" y="1162227"/>
+                </a:lnTo>
+                <a:lnTo>
+                  <a:pt x="4786125" y="1168509"/>
+                </a:lnTo>
+                <a:lnTo>
+                  <a:pt x="4814614" y="1174644"/>
+                </a:lnTo>
+                <a:lnTo>
+                  <a:pt x="4843103" y="1180630"/>
+                </a:lnTo>
+                <a:lnTo>
+                  <a:pt x="4871592" y="1186462"/>
+                </a:lnTo>
+                <a:lnTo>
+                  <a:pt x="4900081" y="1192139"/>
+                </a:lnTo>
+                <a:lnTo>
+                  <a:pt x="4928570" y="1197655"/>
+                </a:lnTo>
+                <a:lnTo>
+                  <a:pt x="4957058" y="1203009"/>
+                </a:lnTo>
+                <a:lnTo>
+                  <a:pt x="4985547" y="1208196"/>
+                </a:lnTo>
+                <a:lnTo>
+                  <a:pt x="5014036" y="1213213"/>
+                </a:lnTo>
+                <a:lnTo>
+                  <a:pt x="5042525" y="1218057"/>
+                </a:lnTo>
+                <a:lnTo>
+                  <a:pt x="5071014" y="1222725"/>
+                </a:lnTo>
+                <a:lnTo>
+                  <a:pt x="5099503" y="1227212"/>
+                </a:lnTo>
+                <a:lnTo>
+                  <a:pt x="5127991" y="1231516"/>
+                </a:lnTo>
+                <a:lnTo>
+                  <a:pt x="5156480" y="1235632"/>
+                </a:lnTo>
+                <a:lnTo>
+                  <a:pt x="5184969" y="1239558"/>
+                </a:lnTo>
+                <a:lnTo>
+                  <a:pt x="5213458" y="1243290"/>
+                </a:lnTo>
+                <a:lnTo>
+                  <a:pt x="5241947" y="1246824"/>
+                </a:lnTo>
+                <a:lnTo>
+                  <a:pt x="5270436" y="1250157"/>
+                </a:lnTo>
+                <a:lnTo>
+                  <a:pt x="5298925" y="1253285"/>
+                </a:lnTo>
+                <a:lnTo>
+                  <a:pt x="5327413" y="1256204"/>
+                </a:lnTo>
+                <a:lnTo>
+                  <a:pt x="5355902" y="1258911"/>
+                </a:lnTo>
+                <a:lnTo>
+                  <a:pt x="5384391" y="1261403"/>
+                </a:lnTo>
+                <a:lnTo>
+                  <a:pt x="5412880" y="1263674"/>
+                </a:lnTo>
+                <a:lnTo>
+                  <a:pt x="5441369" y="1265723"/>
+                </a:lnTo>
+                <a:lnTo>
+                  <a:pt x="5469858" y="1267545"/>
+                </a:lnTo>
+                <a:lnTo>
+                  <a:pt x="5498346" y="1269136"/>
+                </a:lnTo>
+                <a:lnTo>
+                  <a:pt x="5526835" y="1270493"/>
+                </a:lnTo>
+                <a:lnTo>
+                  <a:pt x="5555324" y="1271612"/>
+                </a:lnTo>
+                <a:lnTo>
+                  <a:pt x="5583813" y="1272488"/>
+                </a:lnTo>
+                <a:lnTo>
+                  <a:pt x="5612302" y="1273119"/>
+                </a:lnTo>
+                <a:lnTo>
+                  <a:pt x="5640791" y="1273501"/>
+                </a:lnTo>
+                <a:lnTo>
+                  <a:pt x="5669280" y="1273629"/>
+                </a:lnTo>
+              </a:path>
+            </a:pathLst>
+          </a:custGeom>
+          <a:noFill/>
+          <a:ln w="38100">
             <a:solidFill>
               <a:srgbClr val="8EDBD4"/>
             </a:solidFill>
           </a:ln>
           <a:effectLst/>
         </p:spPr>
-      </p:cxnSp>
-      <p:cxnSp>
-        <p:nvCxnSpPr>
-          <p:cNvPr id="37" name="C4-E17 line 35" descr="sci-ppt:o035"/>
-          <p:cNvCxnSpPr/>
+        <p:txBody>
+          <a:bodyPr rtlCol="0" anchor="ctr"/>
+          <a:lstStyle/>
+          <a:p>
+            <a:pPr algn="ctr"/>
+          </a:p>
+        </p:txBody>
+      </p:sp>
+      <p:sp>
+        <p:nvSpPr>
+          <p:cNvPr id="41" name="C4-E17 polygon 39" descr="sci-ppt:o039"/>
+          <p:cNvSpPr/>
           <p:nvPr/>
-        </p:nvCxnSpPr>
-        <p:spPr>
-          <a:xfrm flipV="1">
-            <a:off x="3533013" y="1395044"/>
-            <a:ext cx="76581" cy="24589"/>
-          </a:xfrm>
-          <a:prstGeom prst="line">
+        </p:nvSpPr>
+        <p:spPr>
+          <a:xfrm>
+            <a:off x="914400" y="2899954"/>
+            <a:ext cx="5669280" cy="1960877"/>
+          </a:xfrm>
+          <a:custGeom>
+            <a:avLst/>
+            <a:gdLst/>
+            <a:ahLst/>
+            <a:cxnLst/>
+            <a:rect l="l" t="t" r="r" b="b"/>
+            <a:pathLst>
+              <a:path w="5669280" h="1960877">
+                <a:moveTo>
+                  <a:pt x="0" y="0"/>
+                </a:moveTo>
+                <a:lnTo>
+                  <a:pt x="28488" y="25600"/>
+                </a:lnTo>
+                <a:lnTo>
+                  <a:pt x="56977" y="51196"/>
+                </a:lnTo>
+                <a:lnTo>
+                  <a:pt x="85466" y="76784"/>
+                </a:lnTo>
+                <a:lnTo>
+                  <a:pt x="113955" y="102361"/>
+                </a:lnTo>
+                <a:lnTo>
+                  <a:pt x="142444" y="127922"/>
+                </a:lnTo>
+                <a:lnTo>
+                  <a:pt x="170933" y="153464"/>
+                </a:lnTo>
+                <a:lnTo>
+                  <a:pt x="199421" y="178982"/>
+                </a:lnTo>
+                <a:lnTo>
+                  <a:pt x="227910" y="204473"/>
+                </a:lnTo>
+                <a:lnTo>
+                  <a:pt x="256399" y="229934"/>
+                </a:lnTo>
+                <a:lnTo>
+                  <a:pt x="284888" y="255359"/>
+                </a:lnTo>
+                <a:lnTo>
+                  <a:pt x="313377" y="280746"/>
+                </a:lnTo>
+                <a:lnTo>
+                  <a:pt x="341866" y="306090"/>
+                </a:lnTo>
+                <a:lnTo>
+                  <a:pt x="370354" y="331387"/>
+                </a:lnTo>
+                <a:lnTo>
+                  <a:pt x="398843" y="356634"/>
+                </a:lnTo>
+                <a:lnTo>
+                  <a:pt x="427332" y="381827"/>
+                </a:lnTo>
+                <a:lnTo>
+                  <a:pt x="455821" y="406961"/>
+                </a:lnTo>
+                <a:lnTo>
+                  <a:pt x="484310" y="432033"/>
+                </a:lnTo>
+                <a:lnTo>
+                  <a:pt x="512799" y="457040"/>
+                </a:lnTo>
+                <a:lnTo>
+                  <a:pt x="541288" y="481977"/>
+                </a:lnTo>
+                <a:lnTo>
+                  <a:pt x="569776" y="506840"/>
+                </a:lnTo>
+                <a:lnTo>
+                  <a:pt x="598265" y="531625"/>
+                </a:lnTo>
+                <a:lnTo>
+                  <a:pt x="626754" y="556329"/>
+                </a:lnTo>
+                <a:lnTo>
+                  <a:pt x="655243" y="580947"/>
+                </a:lnTo>
+                <a:lnTo>
+                  <a:pt x="683732" y="605477"/>
+                </a:lnTo>
+                <a:lnTo>
+                  <a:pt x="712221" y="629913"/>
+                </a:lnTo>
+                <a:lnTo>
+                  <a:pt x="740709" y="654252"/>
+                </a:lnTo>
+                <a:lnTo>
+                  <a:pt x="769198" y="678491"/>
+                </a:lnTo>
+                <a:lnTo>
+                  <a:pt x="797687" y="702625"/>
+                </a:lnTo>
+                <a:lnTo>
+                  <a:pt x="826176" y="726650"/>
+                </a:lnTo>
+                <a:lnTo>
+                  <a:pt x="854665" y="750563"/>
+                </a:lnTo>
+                <a:lnTo>
+                  <a:pt x="883154" y="774359"/>
+                </a:lnTo>
+                <a:lnTo>
+                  <a:pt x="911643" y="798035"/>
+                </a:lnTo>
+                <a:lnTo>
+                  <a:pt x="940131" y="821587"/>
+                </a:lnTo>
+                <a:lnTo>
+                  <a:pt x="968620" y="845011"/>
+                </a:lnTo>
+                <a:lnTo>
+                  <a:pt x="997109" y="868303"/>
+                </a:lnTo>
+                <a:lnTo>
+                  <a:pt x="1025598" y="891459"/>
+                </a:lnTo>
+                <a:lnTo>
+                  <a:pt x="1054087" y="914476"/>
+                </a:lnTo>
+                <a:lnTo>
+                  <a:pt x="1082576" y="937349"/>
+                </a:lnTo>
+                <a:lnTo>
+                  <a:pt x="1111064" y="960075"/>
+                </a:lnTo>
+                <a:lnTo>
+                  <a:pt x="1139553" y="982649"/>
+                </a:lnTo>
+                <a:lnTo>
+                  <a:pt x="1168042" y="1005068"/>
+                </a:lnTo>
+                <a:lnTo>
+                  <a:pt x="1196531" y="1027329"/>
+                </a:lnTo>
+                <a:lnTo>
+                  <a:pt x="1225020" y="1049426"/>
+                </a:lnTo>
+                <a:lnTo>
+                  <a:pt x="1253509" y="1071357"/>
+                </a:lnTo>
+                <a:lnTo>
+                  <a:pt x="1281997" y="1093117"/>
+                </a:lnTo>
+                <a:lnTo>
+                  <a:pt x="1310486" y="1114702"/>
+                </a:lnTo>
+                <a:lnTo>
+                  <a:pt x="1338975" y="1136109"/>
+                </a:lnTo>
+                <a:lnTo>
+                  <a:pt x="1367464" y="1157334"/>
+                </a:lnTo>
+                <a:lnTo>
+                  <a:pt x="1395953" y="1178372"/>
+                </a:lnTo>
+                <a:lnTo>
+                  <a:pt x="1424442" y="1199221"/>
+                </a:lnTo>
+                <a:lnTo>
+                  <a:pt x="1452931" y="1219875"/>
+                </a:lnTo>
+                <a:lnTo>
+                  <a:pt x="1481419" y="1240332"/>
+                </a:lnTo>
+                <a:lnTo>
+                  <a:pt x="1509908" y="1260587"/>
+                </a:lnTo>
+                <a:lnTo>
+                  <a:pt x="1538397" y="1280636"/>
+                </a:lnTo>
+                <a:lnTo>
+                  <a:pt x="1566886" y="1300476"/>
+                </a:lnTo>
+                <a:lnTo>
+                  <a:pt x="1595375" y="1320103"/>
+                </a:lnTo>
+                <a:lnTo>
+                  <a:pt x="1623864" y="1339512"/>
+                </a:lnTo>
+                <a:lnTo>
+                  <a:pt x="1652352" y="1358700"/>
+                </a:lnTo>
+                <a:lnTo>
+                  <a:pt x="1680841" y="1377664"/>
+                </a:lnTo>
+                <a:lnTo>
+                  <a:pt x="1709330" y="1396398"/>
+                </a:lnTo>
+                <a:lnTo>
+                  <a:pt x="1737819" y="1414900"/>
+                </a:lnTo>
+                <a:lnTo>
+                  <a:pt x="1766308" y="1433165"/>
+                </a:lnTo>
+                <a:lnTo>
+                  <a:pt x="1794797" y="1451190"/>
+                </a:lnTo>
+                <a:lnTo>
+                  <a:pt x="1823286" y="1468970"/>
+                </a:lnTo>
+                <a:lnTo>
+                  <a:pt x="1851774" y="1486502"/>
+                </a:lnTo>
+                <a:lnTo>
+                  <a:pt x="1880263" y="1503782"/>
+                </a:lnTo>
+                <a:lnTo>
+                  <a:pt x="1908752" y="1520806"/>
+                </a:lnTo>
+                <a:lnTo>
+                  <a:pt x="1937241" y="1537570"/>
+                </a:lnTo>
+                <a:lnTo>
+                  <a:pt x="1965730" y="1554071"/>
+                </a:lnTo>
+                <a:lnTo>
+                  <a:pt x="1994219" y="1570303"/>
+                </a:lnTo>
+                <a:lnTo>
+                  <a:pt x="2022707" y="1586264"/>
+                </a:lnTo>
+                <a:lnTo>
+                  <a:pt x="2051196" y="1601950"/>
+                </a:lnTo>
+                <a:lnTo>
+                  <a:pt x="2079685" y="1617357"/>
+                </a:lnTo>
+                <a:lnTo>
+                  <a:pt x="2108174" y="1632480"/>
+                </a:lnTo>
+                <a:lnTo>
+                  <a:pt x="2136663" y="1647316"/>
+                </a:lnTo>
+                <a:lnTo>
+                  <a:pt x="2165152" y="1661862"/>
+                </a:lnTo>
+                <a:lnTo>
+                  <a:pt x="2193641" y="1676112"/>
+                </a:lnTo>
+                <a:lnTo>
+                  <a:pt x="2222129" y="1690064"/>
+                </a:lnTo>
+                <a:lnTo>
+                  <a:pt x="2250618" y="1703714"/>
+                </a:lnTo>
+                <a:lnTo>
+                  <a:pt x="2279107" y="1717057"/>
+                </a:lnTo>
+                <a:lnTo>
+                  <a:pt x="2307596" y="1730089"/>
+                </a:lnTo>
+                <a:lnTo>
+                  <a:pt x="2336085" y="1742808"/>
+                </a:lnTo>
+                <a:lnTo>
+                  <a:pt x="2364574" y="1755208"/>
+                </a:lnTo>
+                <a:lnTo>
+                  <a:pt x="2393062" y="1767287"/>
+                </a:lnTo>
+                <a:lnTo>
+                  <a:pt x="2421551" y="1779040"/>
+                </a:lnTo>
+                <a:lnTo>
+                  <a:pt x="2450040" y="1790463"/>
+                </a:lnTo>
+                <a:lnTo>
+                  <a:pt x="2478529" y="1801552"/>
+                </a:lnTo>
+                <a:lnTo>
+                  <a:pt x="2507018" y="1812304"/>
+                </a:lnTo>
+                <a:lnTo>
+                  <a:pt x="2535507" y="1822715"/>
+                </a:lnTo>
+                <a:lnTo>
+                  <a:pt x="2563995" y="1832780"/>
+                </a:lnTo>
+                <a:lnTo>
+                  <a:pt x="2592484" y="1842496"/>
+                </a:lnTo>
+                <a:lnTo>
+                  <a:pt x="2620973" y="1851860"/>
+                </a:lnTo>
+                <a:lnTo>
+                  <a:pt x="2649462" y="1860866"/>
+                </a:lnTo>
+                <a:lnTo>
+                  <a:pt x="2677951" y="1869512"/>
+                </a:lnTo>
+                <a:lnTo>
+                  <a:pt x="2706440" y="1877793"/>
+                </a:lnTo>
+                <a:lnTo>
+                  <a:pt x="2734929" y="1885706"/>
+                </a:lnTo>
+                <a:lnTo>
+                  <a:pt x="2763417" y="1893246"/>
+                </a:lnTo>
+                <a:lnTo>
+                  <a:pt x="2791906" y="1900410"/>
+                </a:lnTo>
+                <a:lnTo>
+                  <a:pt x="2820395" y="1907194"/>
+                </a:lnTo>
+                <a:lnTo>
+                  <a:pt x="2848884" y="1913594"/>
+                </a:lnTo>
+                <a:lnTo>
+                  <a:pt x="2877373" y="1919606"/>
+                </a:lnTo>
+                <a:lnTo>
+                  <a:pt x="2905862" y="1925227"/>
+                </a:lnTo>
+                <a:lnTo>
+                  <a:pt x="2934350" y="1930452"/>
+                </a:lnTo>
+                <a:lnTo>
+                  <a:pt x="2962839" y="1935277"/>
+                </a:lnTo>
+                <a:lnTo>
+                  <a:pt x="2991328" y="1939699"/>
+                </a:lnTo>
+                <a:lnTo>
+                  <a:pt x="3019817" y="1943713"/>
+                </a:lnTo>
+                <a:lnTo>
+                  <a:pt x="3048306" y="1947316"/>
+                </a:lnTo>
+                <a:lnTo>
+                  <a:pt x="3076795" y="1950505"/>
+                </a:lnTo>
+                <a:lnTo>
+                  <a:pt x="3105284" y="1953274"/>
+                </a:lnTo>
+                <a:lnTo>
+                  <a:pt x="3133772" y="1955621"/>
+                </a:lnTo>
+                <a:lnTo>
+                  <a:pt x="3162261" y="1957541"/>
+                </a:lnTo>
+                <a:lnTo>
+                  <a:pt x="3190750" y="1959030"/>
+                </a:lnTo>
+                <a:lnTo>
+                  <a:pt x="3219239" y="1960085"/>
+                </a:lnTo>
+                <a:lnTo>
+                  <a:pt x="3247728" y="1960702"/>
+                </a:lnTo>
+                <a:lnTo>
+                  <a:pt x="3276217" y="1960877"/>
+                </a:lnTo>
+                <a:lnTo>
+                  <a:pt x="3304705" y="1960605"/>
+                </a:lnTo>
+                <a:lnTo>
+                  <a:pt x="3333194" y="1959884"/>
+                </a:lnTo>
+                <a:lnTo>
+                  <a:pt x="3361683" y="1958708"/>
+                </a:lnTo>
+                <a:lnTo>
+                  <a:pt x="3390172" y="1957075"/>
+                </a:lnTo>
+                <a:lnTo>
+                  <a:pt x="3418661" y="1954981"/>
+                </a:lnTo>
+                <a:lnTo>
+                  <a:pt x="3447150" y="1952421"/>
+                </a:lnTo>
+                <a:lnTo>
+                  <a:pt x="3475638" y="1949392"/>
+                </a:lnTo>
+                <a:lnTo>
+                  <a:pt x="3504127" y="1945889"/>
+                </a:lnTo>
+                <a:lnTo>
+                  <a:pt x="3532616" y="1941909"/>
+                </a:lnTo>
+                <a:lnTo>
+                  <a:pt x="3561105" y="1937449"/>
+                </a:lnTo>
+                <a:lnTo>
+                  <a:pt x="3589594" y="1932503"/>
+                </a:lnTo>
+                <a:lnTo>
+                  <a:pt x="3618083" y="1927069"/>
+                </a:lnTo>
+                <a:lnTo>
+                  <a:pt x="3646572" y="1921142"/>
+                </a:lnTo>
+                <a:lnTo>
+                  <a:pt x="3675060" y="1914719"/>
+                </a:lnTo>
+                <a:lnTo>
+                  <a:pt x="3703549" y="1907796"/>
+                </a:lnTo>
+                <a:lnTo>
+                  <a:pt x="3732038" y="1900368"/>
+                </a:lnTo>
+                <a:lnTo>
+                  <a:pt x="3760527" y="1892432"/>
+                </a:lnTo>
+                <a:lnTo>
+                  <a:pt x="3789016" y="1883984"/>
+                </a:lnTo>
+                <a:lnTo>
+                  <a:pt x="3817505" y="1875020"/>
+                </a:lnTo>
+                <a:lnTo>
+                  <a:pt x="3845993" y="1865536"/>
+                </a:lnTo>
+                <a:lnTo>
+                  <a:pt x="3874482" y="1855529"/>
+                </a:lnTo>
+                <a:lnTo>
+                  <a:pt x="3902971" y="1844994"/>
+                </a:lnTo>
+                <a:lnTo>
+                  <a:pt x="3931460" y="1833928"/>
+                </a:lnTo>
+                <a:lnTo>
+                  <a:pt x="3959949" y="1822327"/>
+                </a:lnTo>
+                <a:lnTo>
+                  <a:pt x="3988438" y="1810186"/>
+                </a:lnTo>
+                <a:lnTo>
+                  <a:pt x="4016927" y="1797503"/>
+                </a:lnTo>
+                <a:lnTo>
+                  <a:pt x="4045415" y="1784272"/>
+                </a:lnTo>
+                <a:lnTo>
+                  <a:pt x="4073904" y="1770491"/>
+                </a:lnTo>
+                <a:lnTo>
+                  <a:pt x="4102393" y="1756155"/>
+                </a:lnTo>
+                <a:lnTo>
+                  <a:pt x="4130882" y="1741260"/>
+                </a:lnTo>
+                <a:lnTo>
+                  <a:pt x="4159371" y="1725803"/>
+                </a:lnTo>
+                <a:lnTo>
+                  <a:pt x="4187860" y="1709780"/>
+                </a:lnTo>
+                <a:lnTo>
+                  <a:pt x="4216348" y="1693187"/>
+                </a:lnTo>
+                <a:lnTo>
+                  <a:pt x="4244837" y="1676019"/>
+                </a:lnTo>
+                <a:lnTo>
+                  <a:pt x="4273326" y="1658274"/>
+                </a:lnTo>
+                <a:lnTo>
+                  <a:pt x="4301815" y="1639947"/>
+                </a:lnTo>
+                <a:lnTo>
+                  <a:pt x="4330304" y="1621034"/>
+                </a:lnTo>
+                <a:lnTo>
+                  <a:pt x="4358793" y="1601531"/>
+                </a:lnTo>
+                <a:lnTo>
+                  <a:pt x="4387282" y="1581435"/>
+                </a:lnTo>
+                <a:lnTo>
+                  <a:pt x="4415770" y="1560742"/>
+                </a:lnTo>
+                <a:lnTo>
+                  <a:pt x="4444259" y="1539448"/>
+                </a:lnTo>
+                <a:lnTo>
+                  <a:pt x="4472748" y="1517548"/>
+                </a:lnTo>
+                <a:lnTo>
+                  <a:pt x="4501237" y="1495039"/>
+                </a:lnTo>
+                <a:lnTo>
+                  <a:pt x="4529726" y="1471918"/>
+                </a:lnTo>
+                <a:lnTo>
+                  <a:pt x="4558215" y="1448180"/>
+                </a:lnTo>
+                <a:lnTo>
+                  <a:pt x="4586703" y="1423821"/>
+                </a:lnTo>
+                <a:lnTo>
+                  <a:pt x="4615192" y="1398838"/>
+                </a:lnTo>
+                <a:lnTo>
+                  <a:pt x="4643681" y="1373226"/>
+                </a:lnTo>
+                <a:lnTo>
+                  <a:pt x="4672170" y="1346983"/>
+                </a:lnTo>
+                <a:lnTo>
+                  <a:pt x="4700659" y="1320103"/>
+                </a:lnTo>
+                <a:lnTo>
+                  <a:pt x="4729148" y="1292583"/>
+                </a:lnTo>
+                <a:lnTo>
+                  <a:pt x="4757636" y="1264419"/>
+                </a:lnTo>
+                <a:lnTo>
+                  <a:pt x="4786125" y="1235607"/>
+                </a:lnTo>
+                <a:lnTo>
+                  <a:pt x="4814614" y="1206144"/>
+                </a:lnTo>
+                <a:lnTo>
+                  <a:pt x="4843103" y="1176026"/>
+                </a:lnTo>
+                <a:lnTo>
+                  <a:pt x="4871592" y="1145247"/>
+                </a:lnTo>
+                <a:lnTo>
+                  <a:pt x="4900081" y="1113806"/>
+                </a:lnTo>
+                <a:lnTo>
+                  <a:pt x="4928570" y="1081698"/>
+                </a:lnTo>
+                <a:lnTo>
+                  <a:pt x="4957058" y="1048918"/>
+                </a:lnTo>
+                <a:lnTo>
+                  <a:pt x="4985547" y="1015464"/>
+                </a:lnTo>
+                <a:lnTo>
+                  <a:pt x="5014036" y="981330"/>
+                </a:lnTo>
+                <a:lnTo>
+                  <a:pt x="5042525" y="946514"/>
+                </a:lnTo>
+                <a:lnTo>
+                  <a:pt x="5071014" y="911012"/>
+                </a:lnTo>
+                <a:lnTo>
+                  <a:pt x="5099503" y="874819"/>
+                </a:lnTo>
+                <a:lnTo>
+                  <a:pt x="5127991" y="837932"/>
+                </a:lnTo>
+                <a:lnTo>
+                  <a:pt x="5156480" y="800347"/>
+                </a:lnTo>
+                <a:lnTo>
+                  <a:pt x="5184969" y="762059"/>
+                </a:lnTo>
+                <a:lnTo>
+                  <a:pt x="5213458" y="723066"/>
+                </a:lnTo>
+                <a:lnTo>
+                  <a:pt x="5241947" y="683363"/>
+                </a:lnTo>
+                <a:lnTo>
+                  <a:pt x="5270436" y="642946"/>
+                </a:lnTo>
+                <a:lnTo>
+                  <a:pt x="5298925" y="601811"/>
+                </a:lnTo>
+                <a:lnTo>
+                  <a:pt x="5327413" y="559956"/>
+                </a:lnTo>
+                <a:lnTo>
+                  <a:pt x="5355902" y="517374"/>
+                </a:lnTo>
+                <a:lnTo>
+                  <a:pt x="5384391" y="474064"/>
+                </a:lnTo>
+                <a:lnTo>
+                  <a:pt x="5412880" y="430020"/>
+                </a:lnTo>
+                <a:lnTo>
+                  <a:pt x="5441369" y="385240"/>
+                </a:lnTo>
+                <a:lnTo>
+                  <a:pt x="5469858" y="339719"/>
+                </a:lnTo>
+                <a:lnTo>
+                  <a:pt x="5498346" y="293453"/>
+                </a:lnTo>
+                <a:lnTo>
+                  <a:pt x="5526835" y="246438"/>
+                </a:lnTo>
+                <a:lnTo>
+                  <a:pt x="5555324" y="198671"/>
+                </a:lnTo>
+                <a:lnTo>
+                  <a:pt x="5583813" y="150147"/>
+                </a:lnTo>
+                <a:lnTo>
+                  <a:pt x="5612302" y="100864"/>
+                </a:lnTo>
+                <a:lnTo>
+                  <a:pt x="5640791" y="50816"/>
+                </a:lnTo>
+                <a:lnTo>
+                  <a:pt x="5669280" y="0"/>
+                </a:lnTo>
+              </a:path>
+            </a:pathLst>
+          </a:custGeom>
+          <a:noFill/>
+          <a:ln w="38100">
+            <a:solidFill>
+              <a:srgbClr val="F2B880"/>
+            </a:solidFill>
+          </a:ln>
+          <a:effectLst/>
+        </p:spPr>
+        <p:txBody>
+          <a:bodyPr rtlCol="0" anchor="ctr"/>
+          <a:lstStyle/>
+          <a:p>
+            <a:pPr algn="ctr"/>
+          </a:p>
+        </p:txBody>
+      </p:sp>
+      <p:sp>
+        <p:nvSpPr>
+          <p:cNvPr id="42" name="C4-E17 text 40" descr="sci-ppt:o040"/>
+          <p:cNvSpPr txBox="1"/>
+          <p:nvPr/>
+        </p:nvSpPr>
+        <p:spPr>
+          <a:xfrm>
+            <a:off x="1655064" y="1789611"/>
+            <a:ext cx="548640" cy="247142"/>
+          </a:xfrm>
+          <a:prstGeom prst="rect">
             <a:avLst/>
           </a:prstGeom>
-          <a:ln w="25400">
+          <a:noFill/>
+          <a:effectLst/>
+        </p:spPr>
+        <p:txBody>
+          <a:bodyPr wrap="none" lIns="18288" rIns="18288" tIns="18288" bIns="18288" anchor="t">
+            <a:spAutoFit/>
+          </a:bodyPr>
+          <a:lstStyle/>
+          <a:p>
+            <a:pPr algn="l">
+              <a:spcAft>
+                <a:spcPts val="0"/>
+              </a:spcAft>
+            </a:pPr>
+            <a:r>
+              <a:rPr sz="1300" b="0" i="0">
+                <a:solidFill>
+                  <a:srgbClr val="8EDBD4"/>
+                </a:solidFill>
+                <a:latin typeface="Arial"/>
+              </a:rPr>
+              <a:t>w</a:t>
+            </a:r>
+          </a:p>
+        </p:txBody>
+      </p:sp>
+      <p:sp>
+        <p:nvSpPr>
+          <p:cNvPr id="43" name="C4-E17 text 41" descr="sci-ppt:o041"/>
+          <p:cNvSpPr txBox="1"/>
+          <p:nvPr/>
+        </p:nvSpPr>
+        <p:spPr>
+          <a:xfrm>
+            <a:off x="3935577" y="3473087"/>
+            <a:ext cx="1645920" cy="402081"/>
+          </a:xfrm>
+          <a:prstGeom prst="rect">
+            <a:avLst/>
+          </a:prstGeom>
+          <a:noFill/>
+          <a:effectLst/>
+        </p:spPr>
+        <p:txBody>
+          <a:bodyPr wrap="none" lIns="18288" rIns="18288" tIns="18288" bIns="18288" anchor="t">
+            <a:spAutoFit/>
+          </a:bodyPr>
+          <a:lstStyle/>
+          <a:p>
+            <a:pPr algn="l">
+              <a:spcAft>
+                <a:spcPts val="0"/>
+              </a:spcAft>
+            </a:pPr>
+            <a:r>
+              <a:rPr sz="1150" b="0" i="0">
+                <a:solidFill>
+                  <a:srgbClr val="F2B880"/>
+                </a:solidFill>
+                <a:latin typeface="Arial"/>
+              </a:rPr>
+              <a:t>w′ = p₀r(r²−b²)</a:t>
+            </a:r>
+          </a:p>
+          <a:p>
+            <a:pPr algn="l">
+              <a:spcAft>
+                <a:spcPts val="0"/>
+              </a:spcAft>
+            </a:pPr>
+            <a:r>
+              <a:rPr sz="1150" b="0" i="0">
+                <a:solidFill>
+                  <a:srgbClr val="F2B880"/>
+                </a:solidFill>
+                <a:latin typeface="Arial"/>
+              </a:rPr>
+              <a:t>/(16D_f)</a:t>
+            </a:r>
+          </a:p>
+        </p:txBody>
+      </p:sp>
+      <p:sp>
+        <p:nvSpPr>
+          <p:cNvPr id="44" name="C4-E17 round_rect 42" descr="sci-ppt:o042"/>
+          <p:cNvSpPr/>
+          <p:nvPr/>
+        </p:nvSpPr>
+        <p:spPr>
+          <a:xfrm>
+            <a:off x="6858000" y="1371600"/>
+            <a:ext cx="4983480" cy="3566160"/>
+          </a:xfrm>
+          <a:prstGeom prst="roundRect">
+            <a:avLst/>
+          </a:prstGeom>
+          <a:solidFill>
+            <a:srgbClr val="213E4B"/>
+          </a:solidFill>
+          <a:ln w="20320">
             <a:solidFill>
               <a:srgbClr val="8EDBD4"/>
             </a:solidFill>
           </a:ln>
           <a:effectLst/>
         </p:spPr>
-      </p:cxnSp>
-      <p:cxnSp>
-        <p:nvCxnSpPr>
-          <p:cNvPr id="38" name="C4-E17 line 36" descr="sci-ppt:o036"/>
-          <p:cNvCxnSpPr/>
-          <p:nvPr/>
-        </p:nvCxnSpPr>
-        <p:spPr>
-          <a:xfrm flipV="1">
-            <a:off x="3609594" y="1374077"/>
-            <a:ext cx="76581" cy="20967"/>
-          </a:xfrm>
-          <a:prstGeom prst="line">
-            <a:avLst/>
-          </a:prstGeom>
-          <a:ln w="25400">
-            <a:solidFill>
-              <a:srgbClr val="8EDBD4"/>
-            </a:solidFill>
-          </a:ln>
-          <a:effectLst/>
-        </p:spPr>
-      </p:cxnSp>
-      <p:cxnSp>
-        <p:nvCxnSpPr>
-          <p:cNvPr id="39" name="C4-E17 line 37" descr="sci-ppt:o037"/>
-          <p:cNvCxnSpPr/>
-          <p:nvPr/>
-        </p:nvCxnSpPr>
-        <p:spPr>
-          <a:xfrm flipV="1">
-            <a:off x="3686175" y="1356814"/>
-            <a:ext cx="76581" cy="17263"/>
-          </a:xfrm>
-          <a:prstGeom prst="line">
-            <a:avLst/>
-          </a:prstGeom>
-          <a:ln w="25400">
-            <a:solidFill>
-              <a:srgbClr val="8EDBD4"/>
-            </a:solidFill>
-          </a:ln>
-          <a:effectLst/>
-        </p:spPr>
-      </p:cxnSp>
-      <p:cxnSp>
-        <p:nvCxnSpPr>
-          <p:cNvPr id="40" name="C4-E17 line 38" descr="sci-ppt:o038"/>
-          <p:cNvCxnSpPr/>
-          <p:nvPr/>
-        </p:nvCxnSpPr>
-        <p:spPr>
-          <a:xfrm flipV="1">
-            <a:off x="3762756" y="1343318"/>
-            <a:ext cx="76581" cy="13496"/>
-          </a:xfrm>
-          <a:prstGeom prst="line">
-            <a:avLst/>
-          </a:prstGeom>
-          <a:ln w="25400">
-            <a:solidFill>
-              <a:srgbClr val="8EDBD4"/>
-            </a:solidFill>
-          </a:ln>
-          <a:effectLst/>
-        </p:spPr>
-      </p:cxnSp>
-      <p:cxnSp>
-        <p:nvCxnSpPr>
-          <p:cNvPr id="41" name="C4-E17 line 39" descr="sci-ppt:o039"/>
-          <p:cNvCxnSpPr/>
-          <p:nvPr/>
-        </p:nvCxnSpPr>
-        <p:spPr>
-          <a:xfrm flipV="1">
-            <a:off x="3839337" y="1333642"/>
-            <a:ext cx="76581" cy="9676"/>
-          </a:xfrm>
-          <a:prstGeom prst="line">
-            <a:avLst/>
-          </a:prstGeom>
-          <a:ln w="25400">
-            <a:solidFill>
-              <a:srgbClr val="8EDBD4"/>
-            </a:solidFill>
-          </a:ln>
-          <a:effectLst/>
-        </p:spPr>
-      </p:cxnSp>
-      <p:cxnSp>
-        <p:nvCxnSpPr>
-          <p:cNvPr id="42" name="C4-E17 line 40" descr="sci-ppt:o040"/>
-          <p:cNvCxnSpPr/>
-          <p:nvPr/>
-        </p:nvCxnSpPr>
-        <p:spPr>
-          <a:xfrm flipV="1">
-            <a:off x="3915918" y="1327822"/>
-            <a:ext cx="76581" cy="5820"/>
-          </a:xfrm>
-          <a:prstGeom prst="line">
-            <a:avLst/>
-          </a:prstGeom>
-          <a:ln w="25400">
-            <a:solidFill>
-              <a:srgbClr val="8EDBD4"/>
-            </a:solidFill>
-          </a:ln>
-          <a:effectLst/>
-        </p:spPr>
-      </p:cxnSp>
-      <p:cxnSp>
-        <p:nvCxnSpPr>
-          <p:cNvPr id="43" name="C4-E17 line 41" descr="sci-ppt:o041"/>
-          <p:cNvCxnSpPr/>
-          <p:nvPr/>
-        </p:nvCxnSpPr>
-        <p:spPr>
-          <a:xfrm flipV="1">
-            <a:off x="3992499" y="1325880"/>
-            <a:ext cx="76581" cy="1942"/>
-          </a:xfrm>
-          <a:prstGeom prst="line">
-            <a:avLst/>
-          </a:prstGeom>
-          <a:ln w="25400">
-            <a:solidFill>
-              <a:srgbClr val="8EDBD4"/>
-            </a:solidFill>
-          </a:ln>
-          <a:effectLst/>
-        </p:spPr>
-      </p:cxnSp>
-      <p:cxnSp>
-        <p:nvCxnSpPr>
-          <p:cNvPr id="44" name="C4-E17 line 42" descr="sci-ppt:o042"/>
-          <p:cNvCxnSpPr/>
-          <p:nvPr/>
-        </p:nvCxnSpPr>
-        <p:spPr>
-          <a:xfrm>
-            <a:off x="4069080" y="1325880"/>
-            <a:ext cx="76580" cy="1942"/>
-          </a:xfrm>
-          <a:prstGeom prst="line">
-            <a:avLst/>
-          </a:prstGeom>
-          <a:ln w="25400">
-            <a:solidFill>
-              <a:srgbClr val="8EDBD4"/>
-            </a:solidFill>
-          </a:ln>
-          <a:effectLst/>
-        </p:spPr>
-      </p:cxnSp>
-      <p:cxnSp>
-        <p:nvCxnSpPr>
-          <p:cNvPr id="45" name="C4-E17 line 43" descr="sci-ppt:o043"/>
-          <p:cNvCxnSpPr/>
-          <p:nvPr/>
-        </p:nvCxnSpPr>
-        <p:spPr>
-          <a:xfrm>
-            <a:off x="4145660" y="1327822"/>
-            <a:ext cx="76582" cy="5820"/>
-          </a:xfrm>
-          <a:prstGeom prst="line">
-            <a:avLst/>
-          </a:prstGeom>
-          <a:ln w="25400">
-            <a:solidFill>
-              <a:srgbClr val="8EDBD4"/>
-            </a:solidFill>
-          </a:ln>
-          <a:effectLst/>
-        </p:spPr>
-      </p:cxnSp>
-      <p:cxnSp>
-        <p:nvCxnSpPr>
-          <p:cNvPr id="46" name="C4-E17 line 44" descr="sci-ppt:o044"/>
-          <p:cNvCxnSpPr/>
-          <p:nvPr/>
-        </p:nvCxnSpPr>
-        <p:spPr>
-          <a:xfrm>
-            <a:off x="4222242" y="1333642"/>
-            <a:ext cx="76581" cy="9676"/>
-          </a:xfrm>
-          <a:prstGeom prst="line">
-            <a:avLst/>
-          </a:prstGeom>
-          <a:ln w="25400">
-            <a:solidFill>
-              <a:srgbClr val="8EDBD4"/>
-            </a:solidFill>
-          </a:ln>
-          <a:effectLst/>
-        </p:spPr>
-      </p:cxnSp>
-      <p:cxnSp>
-        <p:nvCxnSpPr>
-          <p:cNvPr id="47" name="C4-E17 line 45" descr="sci-ppt:o045"/>
-          <p:cNvCxnSpPr/>
-          <p:nvPr/>
-        </p:nvCxnSpPr>
-        <p:spPr>
-          <a:xfrm>
-            <a:off x="4298823" y="1343318"/>
-            <a:ext cx="76581" cy="13496"/>
-          </a:xfrm>
-          <a:prstGeom prst="line">
-            <a:avLst/>
-          </a:prstGeom>
-          <a:ln w="25400">
-            <a:solidFill>
-              <a:srgbClr val="8EDBD4"/>
-            </a:solidFill>
-          </a:ln>
-          <a:effectLst/>
-        </p:spPr>
-      </p:cxnSp>
-      <p:cxnSp>
-        <p:nvCxnSpPr>
-          <p:cNvPr id="48" name="C4-E17 line 46" descr="sci-ppt:o046"/>
-          <p:cNvCxnSpPr/>
-          <p:nvPr/>
-        </p:nvCxnSpPr>
-        <p:spPr>
-          <a:xfrm>
-            <a:off x="4375404" y="1356814"/>
-            <a:ext cx="76581" cy="17263"/>
-          </a:xfrm>
-          <a:prstGeom prst="line">
-            <a:avLst/>
-          </a:prstGeom>
-          <a:ln w="25400">
-            <a:solidFill>
-              <a:srgbClr val="8EDBD4"/>
-            </a:solidFill>
-          </a:ln>
-          <a:effectLst/>
-        </p:spPr>
-      </p:cxnSp>
-      <p:cxnSp>
-        <p:nvCxnSpPr>
-          <p:cNvPr id="49" name="C4-E17 line 47" descr="sci-ppt:o047"/>
-          <p:cNvCxnSpPr/>
-          <p:nvPr/>
-        </p:nvCxnSpPr>
-        <p:spPr>
-          <a:xfrm>
-            <a:off x="4451985" y="1374077"/>
-            <a:ext cx="76581" cy="20967"/>
-          </a:xfrm>
-          <a:prstGeom prst="line">
-            <a:avLst/>
-          </a:prstGeom>
-          <a:ln w="25400">
-            <a:solidFill>
-              <a:srgbClr val="8EDBD4"/>
-            </a:solidFill>
-          </a:ln>
-          <a:effectLst/>
-        </p:spPr>
-      </p:cxnSp>
-      <p:cxnSp>
-        <p:nvCxnSpPr>
-          <p:cNvPr id="50" name="C4-E17 line 48" descr="sci-ppt:o048"/>
-          <p:cNvCxnSpPr/>
-          <p:nvPr/>
-        </p:nvCxnSpPr>
-        <p:spPr>
-          <a:xfrm>
-            <a:off x="4528566" y="1395044"/>
-            <a:ext cx="76581" cy="24589"/>
-          </a:xfrm>
-          <a:prstGeom prst="line">
-            <a:avLst/>
-          </a:prstGeom>
-          <a:ln w="25400">
-            <a:solidFill>
-              <a:srgbClr val="8EDBD4"/>
-            </a:solidFill>
-          </a:ln>
-          <a:effectLst/>
-        </p:spPr>
-      </p:cxnSp>
-      <p:cxnSp>
-        <p:nvCxnSpPr>
-          <p:cNvPr id="51" name="C4-E17 line 49" descr="sci-ppt:o049"/>
-          <p:cNvCxnSpPr/>
-          <p:nvPr/>
-        </p:nvCxnSpPr>
-        <p:spPr>
-          <a:xfrm>
-            <a:off x="4605147" y="1419633"/>
-            <a:ext cx="76581" cy="28118"/>
-          </a:xfrm>
-          <a:prstGeom prst="line">
-            <a:avLst/>
-          </a:prstGeom>
-          <a:ln w="25400">
-            <a:solidFill>
-              <a:srgbClr val="8EDBD4"/>
-            </a:solidFill>
-          </a:ln>
-          <a:effectLst/>
-        </p:spPr>
-      </p:cxnSp>
-      <p:cxnSp>
-        <p:nvCxnSpPr>
-          <p:cNvPr id="52" name="C4-E17 line 50" descr="sci-ppt:o050"/>
-          <p:cNvCxnSpPr/>
-          <p:nvPr/>
-        </p:nvCxnSpPr>
-        <p:spPr>
-          <a:xfrm>
-            <a:off x="4681728" y="1447751"/>
-            <a:ext cx="76580" cy="31536"/>
-          </a:xfrm>
-          <a:prstGeom prst="line">
-            <a:avLst/>
-          </a:prstGeom>
-          <a:ln w="25400">
-            <a:solidFill>
-              <a:srgbClr val="8EDBD4"/>
-            </a:solidFill>
-          </a:ln>
-          <a:effectLst/>
-        </p:spPr>
-      </p:cxnSp>
-      <p:cxnSp>
-        <p:nvCxnSpPr>
-          <p:cNvPr id="53" name="C4-E17 line 51" descr="sci-ppt:o051"/>
-          <p:cNvCxnSpPr/>
-          <p:nvPr/>
-        </p:nvCxnSpPr>
-        <p:spPr>
-          <a:xfrm>
-            <a:off x="4758308" y="1479287"/>
-            <a:ext cx="76582" cy="34830"/>
-          </a:xfrm>
-          <a:prstGeom prst="line">
-            <a:avLst/>
-          </a:prstGeom>
-          <a:ln w="25400">
-            <a:solidFill>
-              <a:srgbClr val="8EDBD4"/>
-            </a:solidFill>
-          </a:ln>
-          <a:effectLst/>
-        </p:spPr>
-      </p:cxnSp>
-      <p:cxnSp>
-        <p:nvCxnSpPr>
-          <p:cNvPr id="54" name="C4-E17 line 52" descr="sci-ppt:o052"/>
-          <p:cNvCxnSpPr/>
-          <p:nvPr/>
-        </p:nvCxnSpPr>
-        <p:spPr>
-          <a:xfrm>
-            <a:off x="4834890" y="1514117"/>
-            <a:ext cx="76581" cy="37987"/>
-          </a:xfrm>
-          <a:prstGeom prst="line">
-            <a:avLst/>
-          </a:prstGeom>
-          <a:ln w="25400">
-            <a:solidFill>
-              <a:srgbClr val="8EDBD4"/>
-            </a:solidFill>
-          </a:ln>
-          <a:effectLst/>
-        </p:spPr>
-      </p:cxnSp>
-      <p:cxnSp>
-        <p:nvCxnSpPr>
-          <p:cNvPr id="55" name="C4-E17 line 53" descr="sci-ppt:o053"/>
-          <p:cNvCxnSpPr/>
-          <p:nvPr/>
-        </p:nvCxnSpPr>
-        <p:spPr>
-          <a:xfrm>
-            <a:off x="4911471" y="1552104"/>
-            <a:ext cx="76581" cy="40991"/>
-          </a:xfrm>
-          <a:prstGeom prst="line">
-            <a:avLst/>
-          </a:prstGeom>
-          <a:ln w="25400">
-            <a:solidFill>
-              <a:srgbClr val="8EDBD4"/>
-            </a:solidFill>
-          </a:ln>
-          <a:effectLst/>
-        </p:spPr>
-      </p:cxnSp>
-      <p:cxnSp>
-        <p:nvCxnSpPr>
-          <p:cNvPr id="56" name="C4-E17 line 54" descr="sci-ppt:o054"/>
-          <p:cNvCxnSpPr/>
-          <p:nvPr/>
-        </p:nvCxnSpPr>
-        <p:spPr>
-          <a:xfrm>
-            <a:off x="4988052" y="1593095"/>
-            <a:ext cx="76581" cy="43826"/>
-          </a:xfrm>
-          <a:prstGeom prst="line">
-            <a:avLst/>
-          </a:prstGeom>
-          <a:ln w="25400">
-            <a:solidFill>
-              <a:srgbClr val="8EDBD4"/>
-            </a:solidFill>
-          </a:ln>
-          <a:effectLst/>
-        </p:spPr>
-      </p:cxnSp>
-      <p:cxnSp>
-        <p:nvCxnSpPr>
-          <p:cNvPr id="57" name="C4-E17 line 55" descr="sci-ppt:o055"/>
-          <p:cNvCxnSpPr/>
-          <p:nvPr/>
-        </p:nvCxnSpPr>
-        <p:spPr>
-          <a:xfrm>
-            <a:off x="5064633" y="1636921"/>
-            <a:ext cx="76581" cy="46479"/>
-          </a:xfrm>
-          <a:prstGeom prst="line">
-            <a:avLst/>
-          </a:prstGeom>
-          <a:ln w="25400">
-            <a:solidFill>
-              <a:srgbClr val="8EDBD4"/>
-            </a:solidFill>
-          </a:ln>
-          <a:effectLst/>
-        </p:spPr>
-      </p:cxnSp>
-      <p:cxnSp>
-        <p:nvCxnSpPr>
-          <p:cNvPr id="58" name="C4-E17 line 56" descr="sci-ppt:o056"/>
-          <p:cNvCxnSpPr/>
-          <p:nvPr/>
-        </p:nvCxnSpPr>
-        <p:spPr>
-          <a:xfrm>
-            <a:off x="5141214" y="1683400"/>
-            <a:ext cx="76581" cy="48937"/>
-          </a:xfrm>
-          <a:prstGeom prst="line">
-            <a:avLst/>
-          </a:prstGeom>
-          <a:ln w="25400">
-            <a:solidFill>
-              <a:srgbClr val="8EDBD4"/>
-            </a:solidFill>
-          </a:ln>
-          <a:effectLst/>
-        </p:spPr>
-      </p:cxnSp>
-      <p:cxnSp>
-        <p:nvCxnSpPr>
-          <p:cNvPr id="59" name="C4-E17 line 57" descr="sci-ppt:o057"/>
-          <p:cNvCxnSpPr/>
-          <p:nvPr/>
-        </p:nvCxnSpPr>
-        <p:spPr>
-          <a:xfrm>
-            <a:off x="5217795" y="1732337"/>
-            <a:ext cx="76580" cy="51181"/>
-          </a:xfrm>
-          <a:prstGeom prst="line">
-            <a:avLst/>
-          </a:prstGeom>
-          <a:ln w="25400">
-            <a:solidFill>
-              <a:srgbClr val="8EDBD4"/>
-            </a:solidFill>
-          </a:ln>
-          <a:effectLst/>
-        </p:spPr>
-      </p:cxnSp>
-      <p:cxnSp>
-        <p:nvCxnSpPr>
-          <p:cNvPr id="60" name="C4-E17 line 58" descr="sci-ppt:o058"/>
-          <p:cNvCxnSpPr/>
-          <p:nvPr/>
-        </p:nvCxnSpPr>
-        <p:spPr>
-          <a:xfrm>
-            <a:off x="5294375" y="1783518"/>
-            <a:ext cx="76582" cy="53202"/>
-          </a:xfrm>
-          <a:prstGeom prst="line">
-            <a:avLst/>
-          </a:prstGeom>
-          <a:ln w="25400">
-            <a:solidFill>
-              <a:srgbClr val="8EDBD4"/>
-            </a:solidFill>
-          </a:ln>
-          <a:effectLst/>
-        </p:spPr>
-      </p:cxnSp>
-      <p:cxnSp>
-        <p:nvCxnSpPr>
-          <p:cNvPr id="61" name="C4-E17 line 59" descr="sci-ppt:o059"/>
-          <p:cNvCxnSpPr/>
-          <p:nvPr/>
-        </p:nvCxnSpPr>
-        <p:spPr>
-          <a:xfrm>
-            <a:off x="5370957" y="1836720"/>
-            <a:ext cx="76581" cy="54981"/>
-          </a:xfrm>
-          <a:prstGeom prst="line">
-            <a:avLst/>
-          </a:prstGeom>
-          <a:ln w="25400">
-            <a:solidFill>
-              <a:srgbClr val="8EDBD4"/>
-            </a:solidFill>
-          </a:ln>
-          <a:effectLst/>
-        </p:spPr>
-      </p:cxnSp>
-      <p:cxnSp>
-        <p:nvCxnSpPr>
-          <p:cNvPr id="62" name="C4-E17 line 60" descr="sci-ppt:o060"/>
-          <p:cNvCxnSpPr/>
-          <p:nvPr/>
-        </p:nvCxnSpPr>
-        <p:spPr>
-          <a:xfrm>
-            <a:off x="5447538" y="1891701"/>
-            <a:ext cx="76581" cy="56504"/>
-          </a:xfrm>
-          <a:prstGeom prst="line">
-            <a:avLst/>
-          </a:prstGeom>
-          <a:ln w="25400">
-            <a:solidFill>
-              <a:srgbClr val="8EDBD4"/>
-            </a:solidFill>
-          </a:ln>
-          <a:effectLst/>
-        </p:spPr>
-      </p:cxnSp>
-      <p:cxnSp>
-        <p:nvCxnSpPr>
-          <p:cNvPr id="63" name="C4-E17 line 61" descr="sci-ppt:o061"/>
-          <p:cNvCxnSpPr/>
-          <p:nvPr/>
-        </p:nvCxnSpPr>
-        <p:spPr>
-          <a:xfrm>
-            <a:off x="5524119" y="1948205"/>
-            <a:ext cx="76581" cy="57760"/>
-          </a:xfrm>
-          <a:prstGeom prst="line">
-            <a:avLst/>
-          </a:prstGeom>
-          <a:ln w="25400">
-            <a:solidFill>
-              <a:srgbClr val="8EDBD4"/>
-            </a:solidFill>
-          </a:ln>
-          <a:effectLst/>
-        </p:spPr>
-      </p:cxnSp>
-      <p:cxnSp>
-        <p:nvCxnSpPr>
-          <p:cNvPr id="64" name="C4-E17 line 62" descr="sci-ppt:o062"/>
-          <p:cNvCxnSpPr/>
-          <p:nvPr/>
-        </p:nvCxnSpPr>
-        <p:spPr>
-          <a:xfrm>
-            <a:off x="5600700" y="2005965"/>
-            <a:ext cx="76581" cy="58729"/>
-          </a:xfrm>
-          <a:prstGeom prst="line">
-            <a:avLst/>
-          </a:prstGeom>
-          <a:ln w="25400">
-            <a:solidFill>
-              <a:srgbClr val="8EDBD4"/>
-            </a:solidFill>
-          </a:ln>
-          <a:effectLst/>
-        </p:spPr>
-      </p:cxnSp>
-      <p:cxnSp>
-        <p:nvCxnSpPr>
-          <p:cNvPr id="65" name="C4-E17 line 63" descr="sci-ppt:o063"/>
-          <p:cNvCxnSpPr/>
-          <p:nvPr/>
-        </p:nvCxnSpPr>
-        <p:spPr>
-          <a:xfrm>
-            <a:off x="5677281" y="2064694"/>
-            <a:ext cx="76581" cy="59401"/>
-          </a:xfrm>
-          <a:prstGeom prst="line">
-            <a:avLst/>
-          </a:prstGeom>
-          <a:ln w="25400">
-            <a:solidFill>
-              <a:srgbClr val="8EDBD4"/>
-            </a:solidFill>
-          </a:ln>
-          <a:effectLst/>
-        </p:spPr>
-      </p:cxnSp>
-      <p:cxnSp>
-        <p:nvCxnSpPr>
-          <p:cNvPr id="66" name="C4-E17 line 64" descr="sci-ppt:o064"/>
-          <p:cNvCxnSpPr/>
-          <p:nvPr/>
-        </p:nvCxnSpPr>
-        <p:spPr>
-          <a:xfrm>
-            <a:off x="5753862" y="2124095"/>
-            <a:ext cx="76581" cy="59760"/>
-          </a:xfrm>
-          <a:prstGeom prst="line">
-            <a:avLst/>
-          </a:prstGeom>
-          <a:ln w="25400">
-            <a:solidFill>
-              <a:srgbClr val="8EDBD4"/>
-            </a:solidFill>
-          </a:ln>
-          <a:effectLst/>
-        </p:spPr>
-      </p:cxnSp>
-      <p:cxnSp>
-        <p:nvCxnSpPr>
-          <p:cNvPr id="67" name="C4-E17 line 65" descr="sci-ppt:o065"/>
-          <p:cNvCxnSpPr/>
-          <p:nvPr/>
-        </p:nvCxnSpPr>
-        <p:spPr>
-          <a:xfrm>
-            <a:off x="5830443" y="2183855"/>
-            <a:ext cx="76581" cy="59789"/>
-          </a:xfrm>
-          <a:prstGeom prst="line">
-            <a:avLst/>
-          </a:prstGeom>
-          <a:ln w="25400">
-            <a:solidFill>
-              <a:srgbClr val="8EDBD4"/>
-            </a:solidFill>
-          </a:ln>
-          <a:effectLst/>
-        </p:spPr>
-      </p:cxnSp>
-      <p:cxnSp>
-        <p:nvCxnSpPr>
-          <p:cNvPr id="68" name="C4-E17 line 66" descr="sci-ppt:o066"/>
-          <p:cNvCxnSpPr/>
-          <p:nvPr/>
-        </p:nvCxnSpPr>
-        <p:spPr>
-          <a:xfrm>
-            <a:off x="5907024" y="2243644"/>
-            <a:ext cx="76580" cy="59478"/>
-          </a:xfrm>
-          <a:prstGeom prst="line">
-            <a:avLst/>
-          </a:prstGeom>
-          <a:ln w="25400">
-            <a:solidFill>
-              <a:srgbClr val="8EDBD4"/>
-            </a:solidFill>
-          </a:ln>
-          <a:effectLst/>
-        </p:spPr>
-      </p:cxnSp>
-      <p:cxnSp>
-        <p:nvCxnSpPr>
-          <p:cNvPr id="69" name="C4-E17 line 67" descr="sci-ppt:o067"/>
-          <p:cNvCxnSpPr/>
-          <p:nvPr/>
-        </p:nvCxnSpPr>
-        <p:spPr>
-          <a:xfrm>
-            <a:off x="5983604" y="2303122"/>
-            <a:ext cx="76582" cy="58809"/>
-          </a:xfrm>
-          <a:prstGeom prst="line">
-            <a:avLst/>
-          </a:prstGeom>
-          <a:ln w="25400">
-            <a:solidFill>
-              <a:srgbClr val="8EDBD4"/>
-            </a:solidFill>
-          </a:ln>
-          <a:effectLst/>
-        </p:spPr>
-      </p:cxnSp>
-      <p:cxnSp>
-        <p:nvCxnSpPr>
-          <p:cNvPr id="70" name="C4-E17 line 68" descr="sci-ppt:o068"/>
-          <p:cNvCxnSpPr/>
-          <p:nvPr/>
-        </p:nvCxnSpPr>
-        <p:spPr>
-          <a:xfrm>
-            <a:off x="6060186" y="2361931"/>
-            <a:ext cx="76581" cy="57767"/>
-          </a:xfrm>
-          <a:prstGeom prst="line">
-            <a:avLst/>
-          </a:prstGeom>
-          <a:ln w="25400">
-            <a:solidFill>
-              <a:srgbClr val="8EDBD4"/>
-            </a:solidFill>
-          </a:ln>
-          <a:effectLst/>
-        </p:spPr>
-      </p:cxnSp>
-      <p:cxnSp>
-        <p:nvCxnSpPr>
-          <p:cNvPr id="71" name="C4-E17 line 69" descr="sci-ppt:o069"/>
-          <p:cNvCxnSpPr/>
-          <p:nvPr/>
-        </p:nvCxnSpPr>
-        <p:spPr>
-          <a:xfrm>
-            <a:off x="6136767" y="2419698"/>
-            <a:ext cx="76581" cy="56341"/>
-          </a:xfrm>
-          <a:prstGeom prst="line">
-            <a:avLst/>
-          </a:prstGeom>
-          <a:ln w="25400">
-            <a:solidFill>
-              <a:srgbClr val="8EDBD4"/>
-            </a:solidFill>
-          </a:ln>
-          <a:effectLst/>
-        </p:spPr>
-      </p:cxnSp>
-      <p:cxnSp>
-        <p:nvCxnSpPr>
-          <p:cNvPr id="72" name="C4-E17 line 70" descr="sci-ppt:o070"/>
-          <p:cNvCxnSpPr/>
-          <p:nvPr/>
-        </p:nvCxnSpPr>
-        <p:spPr>
-          <a:xfrm>
-            <a:off x="6213348" y="2476039"/>
-            <a:ext cx="76581" cy="54513"/>
-          </a:xfrm>
-          <a:prstGeom prst="line">
-            <a:avLst/>
-          </a:prstGeom>
-          <a:ln w="25400">
-            <a:solidFill>
-              <a:srgbClr val="8EDBD4"/>
-            </a:solidFill>
-          </a:ln>
-          <a:effectLst/>
-        </p:spPr>
-      </p:cxnSp>
-      <p:cxnSp>
-        <p:nvCxnSpPr>
-          <p:cNvPr id="73" name="C4-E17 line 71" descr="sci-ppt:o071"/>
-          <p:cNvCxnSpPr/>
-          <p:nvPr/>
-        </p:nvCxnSpPr>
-        <p:spPr>
-          <a:xfrm>
-            <a:off x="6289929" y="2530552"/>
-            <a:ext cx="76581" cy="52270"/>
-          </a:xfrm>
-          <a:prstGeom prst="line">
-            <a:avLst/>
-          </a:prstGeom>
-          <a:ln w="25400">
-            <a:solidFill>
-              <a:srgbClr val="8EDBD4"/>
-            </a:solidFill>
-          </a:ln>
-          <a:effectLst/>
-        </p:spPr>
-      </p:cxnSp>
-      <p:cxnSp>
-        <p:nvCxnSpPr>
-          <p:cNvPr id="74" name="C4-E17 line 72" descr="sci-ppt:o072"/>
-          <p:cNvCxnSpPr/>
-          <p:nvPr/>
-        </p:nvCxnSpPr>
-        <p:spPr>
-          <a:xfrm>
-            <a:off x="6366510" y="2582822"/>
-            <a:ext cx="76581" cy="49597"/>
-          </a:xfrm>
-          <a:prstGeom prst="line">
-            <a:avLst/>
-          </a:prstGeom>
-          <a:ln w="25400">
-            <a:solidFill>
-              <a:srgbClr val="8EDBD4"/>
-            </a:solidFill>
-          </a:ln>
-          <a:effectLst/>
-        </p:spPr>
-      </p:cxnSp>
-      <p:cxnSp>
-        <p:nvCxnSpPr>
-          <p:cNvPr id="75" name="C4-E17 line 73" descr="sci-ppt:o073"/>
-          <p:cNvCxnSpPr/>
-          <p:nvPr/>
-        </p:nvCxnSpPr>
-        <p:spPr>
-          <a:xfrm>
-            <a:off x="6443091" y="2632419"/>
-            <a:ext cx="76581" cy="46480"/>
-          </a:xfrm>
-          <a:prstGeom prst="line">
-            <a:avLst/>
-          </a:prstGeom>
-          <a:ln w="25400">
-            <a:solidFill>
-              <a:srgbClr val="8EDBD4"/>
-            </a:solidFill>
-          </a:ln>
-          <a:effectLst/>
-        </p:spPr>
-      </p:cxnSp>
-      <p:cxnSp>
-        <p:nvCxnSpPr>
-          <p:cNvPr id="76" name="C4-E17 line 74" descr="sci-ppt:o074"/>
-          <p:cNvCxnSpPr/>
-          <p:nvPr/>
-        </p:nvCxnSpPr>
-        <p:spPr>
-          <a:xfrm>
-            <a:off x="6519672" y="2678899"/>
-            <a:ext cx="76581" cy="42903"/>
-          </a:xfrm>
-          <a:prstGeom prst="line">
-            <a:avLst/>
-          </a:prstGeom>
-          <a:ln w="25400">
-            <a:solidFill>
-              <a:srgbClr val="8EDBD4"/>
-            </a:solidFill>
-          </a:ln>
-          <a:effectLst/>
-        </p:spPr>
-      </p:cxnSp>
-      <p:cxnSp>
-        <p:nvCxnSpPr>
-          <p:cNvPr id="77" name="C4-E17 line 75" descr="sci-ppt:o075"/>
-          <p:cNvCxnSpPr/>
-          <p:nvPr/>
-        </p:nvCxnSpPr>
-        <p:spPr>
-          <a:xfrm>
-            <a:off x="6596253" y="2721802"/>
-            <a:ext cx="76580" cy="38853"/>
-          </a:xfrm>
-          <a:prstGeom prst="line">
-            <a:avLst/>
-          </a:prstGeom>
-          <a:ln w="25400">
-            <a:solidFill>
-              <a:srgbClr val="8EDBD4"/>
-            </a:solidFill>
-          </a:ln>
-          <a:effectLst/>
-        </p:spPr>
-      </p:cxnSp>
-      <p:cxnSp>
-        <p:nvCxnSpPr>
-          <p:cNvPr id="78" name="C4-E17 line 76" descr="sci-ppt:o076"/>
-          <p:cNvCxnSpPr/>
-          <p:nvPr/>
-        </p:nvCxnSpPr>
-        <p:spPr>
-          <a:xfrm>
-            <a:off x="6672833" y="2760655"/>
-            <a:ext cx="76582" cy="34314"/>
-          </a:xfrm>
-          <a:prstGeom prst="line">
-            <a:avLst/>
-          </a:prstGeom>
-          <a:ln w="25400">
-            <a:solidFill>
-              <a:srgbClr val="8EDBD4"/>
-            </a:solidFill>
-          </a:ln>
-          <a:effectLst/>
-        </p:spPr>
-      </p:cxnSp>
-      <p:cxnSp>
-        <p:nvCxnSpPr>
-          <p:cNvPr id="79" name="C4-E17 line 77" descr="sci-ppt:o077"/>
-          <p:cNvCxnSpPr/>
-          <p:nvPr/>
-        </p:nvCxnSpPr>
-        <p:spPr>
-          <a:xfrm>
-            <a:off x="6749415" y="2794969"/>
-            <a:ext cx="76581" cy="29274"/>
-          </a:xfrm>
-          <a:prstGeom prst="line">
-            <a:avLst/>
-          </a:prstGeom>
-          <a:ln w="25400">
-            <a:solidFill>
-              <a:srgbClr val="8EDBD4"/>
-            </a:solidFill>
-          </a:ln>
-          <a:effectLst/>
-        </p:spPr>
-      </p:cxnSp>
-      <p:cxnSp>
-        <p:nvCxnSpPr>
-          <p:cNvPr id="80" name="C4-E17 line 78" descr="sci-ppt:o078"/>
-          <p:cNvCxnSpPr/>
-          <p:nvPr/>
-        </p:nvCxnSpPr>
-        <p:spPr>
-          <a:xfrm>
-            <a:off x="6825996" y="2824243"/>
-            <a:ext cx="76581" cy="23715"/>
-          </a:xfrm>
-          <a:prstGeom prst="line">
-            <a:avLst/>
-          </a:prstGeom>
-          <a:ln w="25400">
-            <a:solidFill>
-              <a:srgbClr val="8EDBD4"/>
-            </a:solidFill>
-          </a:ln>
-          <a:effectLst/>
-        </p:spPr>
-      </p:cxnSp>
-      <p:cxnSp>
-        <p:nvCxnSpPr>
-          <p:cNvPr id="81" name="C4-E17 line 79" descr="sci-ppt:o079"/>
-          <p:cNvCxnSpPr/>
-          <p:nvPr/>
-        </p:nvCxnSpPr>
-        <p:spPr>
-          <a:xfrm>
-            <a:off x="6902577" y="2847958"/>
-            <a:ext cx="76581" cy="17624"/>
-          </a:xfrm>
-          <a:prstGeom prst="line">
-            <a:avLst/>
-          </a:prstGeom>
-          <a:ln w="25400">
-            <a:solidFill>
-              <a:srgbClr val="8EDBD4"/>
-            </a:solidFill>
-          </a:ln>
-          <a:effectLst/>
-        </p:spPr>
-      </p:cxnSp>
-      <p:cxnSp>
-        <p:nvCxnSpPr>
-          <p:cNvPr id="82" name="C4-E17 line 80" descr="sci-ppt:o080"/>
-          <p:cNvCxnSpPr/>
-          <p:nvPr/>
-        </p:nvCxnSpPr>
-        <p:spPr>
-          <a:xfrm>
-            <a:off x="6979158" y="2865582"/>
-            <a:ext cx="76581" cy="10988"/>
-          </a:xfrm>
-          <a:prstGeom prst="line">
-            <a:avLst/>
-          </a:prstGeom>
-          <a:ln w="25400">
-            <a:solidFill>
-              <a:srgbClr val="8EDBD4"/>
-            </a:solidFill>
-          </a:ln>
-          <a:effectLst/>
-        </p:spPr>
-      </p:cxnSp>
-      <p:cxnSp>
-        <p:nvCxnSpPr>
-          <p:cNvPr id="83" name="C4-E17 line 81" descr="sci-ppt:o081"/>
-          <p:cNvCxnSpPr/>
-          <p:nvPr/>
-        </p:nvCxnSpPr>
-        <p:spPr>
-          <a:xfrm>
-            <a:off x="7055739" y="2876570"/>
-            <a:ext cx="76581" cy="3790"/>
-          </a:xfrm>
-          <a:prstGeom prst="line">
-            <a:avLst/>
-          </a:prstGeom>
-          <a:ln w="25400">
-            <a:solidFill>
-              <a:srgbClr val="8EDBD4"/>
-            </a:solidFill>
-          </a:ln>
-          <a:effectLst/>
-        </p:spPr>
-      </p:cxnSp>
-      <p:sp>
-        <p:nvSpPr>
-          <p:cNvPr id="84" name="C4-E17 rect 82" descr="sci-ppt:o082"/>
-          <p:cNvSpPr/>
-          <p:nvPr/>
-        </p:nvSpPr>
-        <p:spPr>
-          <a:xfrm>
-            <a:off x="777240" y="2651760"/>
-            <a:ext cx="274320" cy="457200"/>
-          </a:xfrm>
-          <a:prstGeom prst="rect">
-            <a:avLst/>
-          </a:prstGeom>
-          <a:solidFill>
-            <a:srgbClr val="213E4B"/>
-          </a:solidFill>
-          <a:ln w="19050">
-            <a:solidFill>
-              <a:srgbClr val="B4C7D2"/>
-            </a:solidFill>
-          </a:ln>
-          <a:effectLst/>
-        </p:spPr>
         <p:txBody>
           <a:bodyPr rtlCol="0" anchor="ctr"/>
           <a:lstStyle/>
@@ -4952,70 +5590,14 @@
       </p:sp>
       <p:sp>
         <p:nvSpPr>
-          <p:cNvPr id="85" name="C4-E17 rect 83" descr="sci-ppt:o083"/>
-          <p:cNvSpPr/>
-          <p:nvPr/>
-        </p:nvSpPr>
-        <p:spPr>
-          <a:xfrm>
-            <a:off x="7086600" y="2651760"/>
-            <a:ext cx="274320" cy="457200"/>
-          </a:xfrm>
-          <a:prstGeom prst="rect">
-            <a:avLst/>
-          </a:prstGeom>
-          <a:solidFill>
-            <a:srgbClr val="213E4B"/>
-          </a:solidFill>
-          <a:ln w="19050">
-            <a:solidFill>
-              <a:srgbClr val="B4C7D2"/>
-            </a:solidFill>
-          </a:ln>
-          <a:effectLst/>
-        </p:spPr>
-        <p:txBody>
-          <a:bodyPr rtlCol="0" anchor="ctr"/>
-          <a:lstStyle/>
-          <a:p>
-            <a:pPr algn="ctr"/>
-          </a:p>
-        </p:txBody>
-      </p:sp>
-      <p:cxnSp>
-        <p:nvCxnSpPr>
-          <p:cNvPr id="86" name="C4-E17 arrow 84" descr="sci-ppt:o084"/>
-          <p:cNvCxnSpPr/>
-          <p:nvPr/>
-        </p:nvCxnSpPr>
-        <p:spPr>
-          <a:xfrm flipV="1">
-            <a:off x="4069080" y="1371600"/>
-            <a:ext cx="0" cy="1463040"/>
-          </a:xfrm>
-          <a:prstGeom prst="line">
-            <a:avLst/>
-          </a:prstGeom>
-          <a:ln w="25400">
-            <a:solidFill>
-              <a:srgbClr val="8EDBD4"/>
-            </a:solidFill>
-            <a:headEnd type="none" w="med" len="med"/>
-            <a:tailEnd type="triangle" w="med" len="med"/>
-          </a:ln>
-          <a:effectLst/>
-        </p:spPr>
-      </p:cxnSp>
-      <p:sp>
-        <p:nvSpPr>
-          <p:cNvPr id="87" name="C4-E17 text 85" descr="sci-ppt:o085"/>
+          <p:cNvPr id="45" name="C4-E17 text 43" descr="sci-ppt:o043"/>
           <p:cNvSpPr txBox="1"/>
           <p:nvPr/>
         </p:nvSpPr>
         <p:spPr>
           <a:xfrm>
-            <a:off x="4206240" y="1920240"/>
-            <a:ext cx="2560320" cy="411480"/>
+            <a:off x="6967728" y="1426464"/>
+            <a:ext cx="4764024" cy="254889"/>
           </a:xfrm>
           <a:prstGeom prst="rect">
             <a:avLst/>
@@ -5024,7 +5606,7 @@
           <a:effectLst/>
         </p:spPr>
         <p:txBody>
-          <a:bodyPr wrap="square" lIns="27432" rIns="27432" tIns="18288" bIns="18288" anchor="ctr">
+          <a:bodyPr wrap="none" lIns="18288" rIns="18288" tIns="18288" bIns="18288" anchor="t">
             <a:spAutoFit/>
           </a:bodyPr>
           <a:lstStyle/>
@@ -5035,99 +5617,67 @@
               </a:spcAft>
             </a:pPr>
             <a:r>
-              <a:rPr sz="1800" b="0" i="0">
+              <a:rPr sz="1350" b="1" i="0">
+                <a:solidFill>
+                  <a:srgbClr val="8EDBD4"/>
+                </a:solidFill>
+                <a:latin typeface="Arial"/>
+              </a:rPr>
+              <a:t>Direct verification</a:t>
+            </a:r>
+          </a:p>
+        </p:txBody>
+      </p:sp>
+      <p:sp>
+        <p:nvSpPr>
+          <p:cNvPr id="46" name="C4-E17 text 44" descr="sci-ppt:o044"/>
+          <p:cNvSpPr txBox="1"/>
+          <p:nvPr/>
+        </p:nvSpPr>
+        <p:spPr>
+          <a:xfrm>
+            <a:off x="6995160" y="1828800"/>
+            <a:ext cx="4754880" cy="239395"/>
+          </a:xfrm>
+          <a:prstGeom prst="rect">
+            <a:avLst/>
+          </a:prstGeom>
+          <a:noFill/>
+          <a:effectLst/>
+        </p:spPr>
+        <p:txBody>
+          <a:bodyPr wrap="none" lIns="18288" rIns="18288" tIns="18288" bIns="18288" anchor="t">
+            <a:spAutoFit/>
+          </a:bodyPr>
+          <a:lstStyle/>
+          <a:p>
+            <a:pPr algn="l">
+              <a:spcAft>
+                <a:spcPts val="0"/>
+              </a:spcAft>
+            </a:pPr>
+            <a:r>
+              <a:rPr sz="1250" b="1" i="0">
                 <a:solidFill>
                   <a:srgbClr val="E7F0F3"/>
                 </a:solidFill>
                 <a:latin typeface="Arial"/>
               </a:rPr>
-              <a:t>w(r) ↑</a:t>
-            </a:r>
-          </a:p>
-        </p:txBody>
-      </p:sp>
-      <p:cxnSp>
-        <p:nvCxnSpPr>
-          <p:cNvPr id="88" name="C4-E17 arrow 86" descr="sci-ppt:o086"/>
-          <p:cNvCxnSpPr/>
-          <p:nvPr/>
-        </p:nvCxnSpPr>
-        <p:spPr>
-          <a:xfrm flipV="1">
-            <a:off x="2286000" y="2971800"/>
-            <a:ext cx="0" cy="594360"/>
-          </a:xfrm>
-          <a:prstGeom prst="line">
-            <a:avLst/>
-          </a:prstGeom>
-          <a:ln w="25400">
-            <a:solidFill>
-              <a:srgbClr val="8EDBD4"/>
-            </a:solidFill>
-            <a:headEnd type="none" w="med" len="med"/>
-            <a:tailEnd type="triangle" w="med" len="med"/>
-          </a:ln>
-          <a:effectLst/>
-        </p:spPr>
-      </p:cxnSp>
-      <p:cxnSp>
-        <p:nvCxnSpPr>
-          <p:cNvPr id="89" name="C4-E17 arrow 87" descr="sci-ppt:o087"/>
-          <p:cNvCxnSpPr/>
-          <p:nvPr/>
-        </p:nvCxnSpPr>
-        <p:spPr>
-          <a:xfrm flipV="1">
-            <a:off x="4069080" y="2971800"/>
-            <a:ext cx="0" cy="594360"/>
-          </a:xfrm>
-          <a:prstGeom prst="line">
-            <a:avLst/>
-          </a:prstGeom>
-          <a:ln w="25400">
-            <a:solidFill>
-              <a:srgbClr val="8EDBD4"/>
-            </a:solidFill>
-            <a:headEnd type="none" w="med" len="med"/>
-            <a:tailEnd type="triangle" w="med" len="med"/>
-          </a:ln>
-          <a:effectLst/>
-        </p:spPr>
-      </p:cxnSp>
-      <p:cxnSp>
-        <p:nvCxnSpPr>
-          <p:cNvPr id="90" name="C4-E17 arrow 88" descr="sci-ppt:o088"/>
-          <p:cNvCxnSpPr/>
-          <p:nvPr/>
-        </p:nvCxnSpPr>
-        <p:spPr>
-          <a:xfrm flipV="1">
-            <a:off x="5852160" y="2971800"/>
-            <a:ext cx="0" cy="594360"/>
-          </a:xfrm>
-          <a:prstGeom prst="line">
-            <a:avLst/>
-          </a:prstGeom>
-          <a:ln w="25400">
-            <a:solidFill>
-              <a:srgbClr val="8EDBD4"/>
-            </a:solidFill>
-            <a:headEnd type="none" w="med" len="med"/>
-            <a:tailEnd type="triangle" w="med" len="med"/>
-          </a:ln>
-          <a:effectLst/>
-        </p:spPr>
-      </p:cxnSp>
-      <p:sp>
-        <p:nvSpPr>
-          <p:cNvPr id="91" name="C4-E17 text 89" descr="sci-ppt:o089"/>
+              <a:t>𝓛ᵣ(r²) = 4,   𝓛ᵣ(r⁴) = 16 r²</a:t>
+            </a:r>
+          </a:p>
+        </p:txBody>
+      </p:sp>
+      <p:sp>
+        <p:nvSpPr>
+          <p:cNvPr id="47" name="C4-E17 text 45" descr="sci-ppt:o045"/>
           <p:cNvSpPr txBox="1"/>
           <p:nvPr/>
         </p:nvSpPr>
         <p:spPr>
           <a:xfrm>
-            <a:off x="2834640" y="3611880"/>
-            <a:ext cx="3657600" cy="274320"/>
+            <a:off x="6995160" y="2331720"/>
+            <a:ext cx="4754880" cy="223900"/>
           </a:xfrm>
           <a:prstGeom prst="rect">
             <a:avLst/>
@@ -5136,7 +5686,7 @@
           <a:effectLst/>
         </p:spPr>
         <p:txBody>
-          <a:bodyPr wrap="square" lIns="27432" rIns="27432" tIns="18288" bIns="18288" anchor="ctr">
+          <a:bodyPr wrap="none" lIns="18288" rIns="18288" tIns="18288" bIns="18288" anchor="t">
             <a:spAutoFit/>
           </a:bodyPr>
           <a:lstStyle/>
@@ -5147,49 +5697,27 @@
               </a:spcAft>
             </a:pPr>
             <a:r>
-              <a:rPr sz="1600" b="0" i="0">
+              <a:rPr sz="1150" b="1" i="0">
                 <a:solidFill>
                   <a:srgbClr val="E7F0F3"/>
                 </a:solidFill>
                 <a:latin typeface="Arial"/>
               </a:rPr>
-              <a:t>p₀: maintained pressure</a:t>
-            </a:r>
-          </a:p>
-        </p:txBody>
-      </p:sp>
-      <p:cxnSp>
-        <p:nvCxnSpPr>
-          <p:cNvPr id="92" name="C4-E17 line 90" descr="sci-ppt:o090"/>
-          <p:cNvCxnSpPr/>
-          <p:nvPr/>
-        </p:nvCxnSpPr>
-        <p:spPr>
-          <a:xfrm>
-            <a:off x="4069080" y="3200400"/>
-            <a:ext cx="3063240" cy="0"/>
-          </a:xfrm>
-          <a:prstGeom prst="line">
-            <a:avLst/>
-          </a:prstGeom>
-          <a:ln w="25400">
-            <a:solidFill>
-              <a:srgbClr val="8EDBD4"/>
-            </a:solidFill>
-          </a:ln>
-          <a:effectLst/>
-        </p:spPr>
-      </p:cxnSp>
-      <p:sp>
-        <p:nvSpPr>
-          <p:cNvPr id="93" name="C4-E17 text 91" descr="sci-ppt:o091"/>
+              <a:t>𝓛ᵣ w ∝ −8 + 16 r²,  𝓛ᵣ²w ∝ 64  ⇒  D_f 𝓛ᵣ²w = p₀</a:t>
+            </a:r>
+          </a:p>
+        </p:txBody>
+      </p:sp>
+      <p:sp>
+        <p:nvSpPr>
+          <p:cNvPr id="48" name="C4-E17 text 46" descr="sci-ppt:o046"/>
           <p:cNvSpPr txBox="1"/>
           <p:nvPr/>
         </p:nvSpPr>
         <p:spPr>
           <a:xfrm>
-            <a:off x="5486400" y="3246120"/>
-            <a:ext cx="914400" cy="274320"/>
+            <a:off x="6995160" y="2834640"/>
+            <a:ext cx="4754880" cy="239395"/>
           </a:xfrm>
           <a:prstGeom prst="rect">
             <a:avLst/>
@@ -5198,7 +5726,7 @@
           <a:effectLst/>
         </p:spPr>
         <p:txBody>
-          <a:bodyPr wrap="square" lIns="27432" rIns="27432" tIns="18288" bIns="18288" anchor="ctr">
+          <a:bodyPr wrap="none" lIns="18288" rIns="18288" tIns="18288" bIns="18288" anchor="t">
             <a:spAutoFit/>
           </a:bodyPr>
           <a:lstStyle/>
@@ -5209,81 +5737,107 @@
               </a:spcAft>
             </a:pPr>
             <a:r>
-              <a:rPr sz="1600" b="0" i="0">
+              <a:rPr sz="1250" b="1" i="0">
+                <a:solidFill>
+                  <a:srgbClr val="F2B880"/>
+                </a:solidFill>
+                <a:latin typeface="Arial"/>
+              </a:rPr>
+              <a:t>w′(r) = p₀ r (r² − b²) / (16D_f)</a:t>
+            </a:r>
+          </a:p>
+        </p:txBody>
+      </p:sp>
+      <p:sp>
+        <p:nvSpPr>
+          <p:cNvPr id="49" name="C4-E17 text 47" descr="sci-ppt:o047"/>
+          <p:cNvSpPr txBox="1"/>
+          <p:nvPr/>
+        </p:nvSpPr>
+        <p:spPr>
+          <a:xfrm>
+            <a:off x="6995160" y="3474720"/>
+            <a:ext cx="4754880" cy="231648"/>
+          </a:xfrm>
+          <a:prstGeom prst="rect">
+            <a:avLst/>
+          </a:prstGeom>
+          <a:noFill/>
+          <a:effectLst/>
+        </p:spPr>
+        <p:txBody>
+          <a:bodyPr wrap="none" lIns="18288" rIns="18288" tIns="18288" bIns="18288" anchor="t">
+            <a:spAutoFit/>
+          </a:bodyPr>
+          <a:lstStyle/>
+          <a:p>
+            <a:pPr algn="l">
+              <a:spcAft>
+                <a:spcPts val="0"/>
+              </a:spcAft>
+            </a:pPr>
+            <a:r>
+              <a:rPr sz="1200" b="0" i="0">
+                <a:solidFill>
+                  <a:srgbClr val="B4C7D2"/>
+                </a:solidFill>
+                <a:latin typeface="Arial"/>
+              </a:rPr>
+              <a:t>Slope zero at r = 0 and r = b; steepest between.</a:t>
+            </a:r>
+          </a:p>
+        </p:txBody>
+      </p:sp>
+      <p:sp>
+        <p:nvSpPr>
+          <p:cNvPr id="50" name="C4-E17 text 48" descr="sci-ppt:o048"/>
+          <p:cNvSpPr txBox="1"/>
+          <p:nvPr/>
+        </p:nvSpPr>
+        <p:spPr>
+          <a:xfrm>
+            <a:off x="914400" y="5486400"/>
+            <a:ext cx="10972800" cy="239395"/>
+          </a:xfrm>
+          <a:prstGeom prst="rect">
+            <a:avLst/>
+          </a:prstGeom>
+          <a:noFill/>
+          <a:effectLst/>
+        </p:spPr>
+        <p:txBody>
+          <a:bodyPr wrap="none" lIns="18288" rIns="18288" tIns="18288" bIns="18288" anchor="t">
+            <a:spAutoFit/>
+          </a:bodyPr>
+          <a:lstStyle/>
+          <a:p>
+            <a:pPr algn="l">
+              <a:spcAft>
+                <a:spcPts val="0"/>
+              </a:spcAft>
+            </a:pPr>
+            <a:r>
+              <a:rPr sz="1250" b="0" i="0">
                 <a:solidFill>
                   <a:srgbClr val="E7F0F3"/>
                 </a:solidFill>
                 <a:latin typeface="Arial"/>
               </a:rPr>
-              <a:t>b</a:t>
-            </a:r>
-          </a:p>
-        </p:txBody>
-      </p:sp>
-      <p:sp>
-        <p:nvSpPr>
-          <p:cNvPr id="94" name="C4-E17 ellipse 92" descr="sci-ppt:o092"/>
-          <p:cNvSpPr/>
-          <p:nvPr/>
-        </p:nvSpPr>
-        <p:spPr>
-          <a:xfrm>
-            <a:off x="8686800" y="1097280"/>
-            <a:ext cx="1920240" cy="1920240"/>
-          </a:xfrm>
-          <a:prstGeom prst="ellipse">
-            <a:avLst/>
-          </a:prstGeom>
-          <a:noFill/>
-          <a:ln w="19050">
-            <a:solidFill>
-              <a:srgbClr val="B4C7D2"/>
-            </a:solidFill>
-          </a:ln>
-          <a:effectLst/>
-        </p:spPr>
-        <p:txBody>
-          <a:bodyPr rtlCol="0" anchor="ctr"/>
-          <a:lstStyle/>
-          <a:p>
-            <a:pPr algn="ctr"/>
-          </a:p>
-        </p:txBody>
-      </p:sp>
-      <p:cxnSp>
-        <p:nvCxnSpPr>
-          <p:cNvPr id="95" name="C4-E17 arrow 93" descr="sci-ppt:o093"/>
-          <p:cNvCxnSpPr/>
-          <p:nvPr/>
-        </p:nvCxnSpPr>
-        <p:spPr>
-          <a:xfrm>
-            <a:off x="9646920" y="2057400"/>
-            <a:ext cx="960120" cy="0"/>
-          </a:xfrm>
-          <a:prstGeom prst="line">
-            <a:avLst/>
-          </a:prstGeom>
-          <a:ln w="25400">
-            <a:solidFill>
-              <a:srgbClr val="8EDBD4"/>
-            </a:solidFill>
-            <a:headEnd type="none" w="med" len="med"/>
-            <a:tailEnd type="triangle" w="med" len="med"/>
-          </a:ln>
-          <a:effectLst/>
-        </p:spPr>
-      </p:cxnSp>
-      <p:sp>
-        <p:nvSpPr>
-          <p:cNvPr id="96" name="C4-E17 text 94" descr="sci-ppt:o094"/>
+              <a:t>Differentiating the answer back reproduces the governing equation, so the solution is verified, not assumed.</a:t>
+            </a:r>
+          </a:p>
+        </p:txBody>
+      </p:sp>
+      <p:sp>
+        <p:nvSpPr>
+          <p:cNvPr id="51" name="C4-E17 text 49" descr="sci-ppt:o049"/>
           <p:cNvSpPr txBox="1"/>
           <p:nvPr/>
         </p:nvSpPr>
         <p:spPr>
           <a:xfrm>
-            <a:off x="9875520" y="1645920"/>
-            <a:ext cx="914400" cy="274320"/>
+            <a:off x="320040" y="6510528"/>
+            <a:ext cx="11521440" cy="200660"/>
           </a:xfrm>
           <a:prstGeom prst="rect">
             <a:avLst/>
@@ -5292,429 +5846,7 @@
           <a:effectLst/>
         </p:spPr>
         <p:txBody>
-          <a:bodyPr wrap="square" lIns="27432" rIns="27432" tIns="18288" bIns="18288" anchor="ctr">
-            <a:spAutoFit/>
-          </a:bodyPr>
-          <a:lstStyle/>
-          <a:p>
-            <a:pPr algn="l">
-              <a:spcAft>
-                <a:spcPts val="0"/>
-              </a:spcAft>
-            </a:pPr>
-            <a:r>
-              <a:rPr sz="1700" b="0" i="0">
-                <a:solidFill>
-                  <a:srgbClr val="E7F0F3"/>
-                </a:solidFill>
-                <a:latin typeface="Arial"/>
-              </a:rPr>
-              <a:t>b</a:t>
-            </a:r>
-          </a:p>
-        </p:txBody>
-      </p:sp>
-      <p:sp>
-        <p:nvSpPr>
-          <p:cNvPr id="97" name="C4-E17 text 95" descr="sci-ppt:o095"/>
-          <p:cNvSpPr txBox="1"/>
-          <p:nvPr/>
-        </p:nvSpPr>
-        <p:spPr>
-          <a:xfrm>
-            <a:off x="8503920" y="3291840"/>
-            <a:ext cx="2743200" cy="365760"/>
-          </a:xfrm>
-          <a:prstGeom prst="rect">
-            <a:avLst/>
-          </a:prstGeom>
-          <a:noFill/>
-          <a:effectLst/>
-        </p:spPr>
-        <p:txBody>
-          <a:bodyPr wrap="square" lIns="27432" rIns="27432" tIns="18288" bIns="18288" anchor="ctr">
-            <a:spAutoFit/>
-          </a:bodyPr>
-          <a:lstStyle/>
-          <a:p>
-            <a:pPr algn="l">
-              <a:spcAft>
-                <a:spcPts val="0"/>
-              </a:spcAft>
-            </a:pPr>
-            <a:r>
-              <a:rPr sz="1800" b="0" i="0">
-                <a:solidFill>
-                  <a:srgbClr val="E7F0F3"/>
-                </a:solidFill>
-                <a:latin typeface="Arial"/>
-              </a:rPr>
-              <a:t>A_c = π b²</a:t>
-            </a:r>
-          </a:p>
-        </p:txBody>
-      </p:sp>
-      <p:sp>
-        <p:nvSpPr>
-          <p:cNvPr id="98" name="C4-E17 text 96" descr="sci-ppt:o096"/>
-          <p:cNvSpPr txBox="1"/>
-          <p:nvPr/>
-        </p:nvSpPr>
-        <p:spPr>
-          <a:xfrm>
-            <a:off x="685800" y="731520"/>
-            <a:ext cx="10972800" cy="365760"/>
-          </a:xfrm>
-          <a:prstGeom prst="rect">
-            <a:avLst/>
-          </a:prstGeom>
-          <a:noFill/>
-          <a:effectLst/>
-        </p:spPr>
-        <p:txBody>
-          <a:bodyPr wrap="square" lIns="27432" rIns="27432" tIns="18288" bIns="18288" anchor="ctr">
-            <a:spAutoFit/>
-          </a:bodyPr>
-          <a:lstStyle/>
-          <a:p>
-            <a:pPr algn="l">
-              <a:spcAft>
-                <a:spcPts val="0"/>
-              </a:spcAft>
-            </a:pPr>
-            <a:r>
-              <a:rPr sz="1800" b="0" i="0">
-                <a:solidFill>
-                  <a:srgbClr val="8EDBD4"/>
-                </a:solidFill>
-                <a:latin typeface="Arial"/>
-              </a:rPr>
-              <a:t>Clamped circular blister: w(b) = 0; w′(b) = 0; regular centre.</a:t>
-            </a:r>
-          </a:p>
-        </p:txBody>
-      </p:sp>
-      <p:cxnSp>
-        <p:nvCxnSpPr>
-          <p:cNvPr id="99" name="C4-E17 line 97" descr="sci-ppt:o097"/>
-          <p:cNvCxnSpPr/>
-          <p:nvPr/>
-        </p:nvCxnSpPr>
-        <p:spPr>
-          <a:xfrm>
-            <a:off x="274320" y="3977639"/>
-            <a:ext cx="11612880" cy="0"/>
-          </a:xfrm>
-          <a:prstGeom prst="line">
-            <a:avLst/>
-          </a:prstGeom>
-          <a:ln w="12700">
-            <a:solidFill>
-              <a:srgbClr val="405967"/>
-            </a:solidFill>
-          </a:ln>
-          <a:effectLst/>
-        </p:spPr>
-      </p:cxnSp>
-      <p:sp>
-        <p:nvSpPr>
-          <p:cNvPr id="100" name="C4-E17 text 98" descr="sci-ppt:o098"/>
-          <p:cNvSpPr txBox="1"/>
-          <p:nvPr/>
-        </p:nvSpPr>
-        <p:spPr>
-          <a:xfrm>
-            <a:off x="320040" y="4096512"/>
-            <a:ext cx="5715000" cy="246888"/>
-          </a:xfrm>
-          <a:prstGeom prst="rect">
-            <a:avLst/>
-          </a:prstGeom>
-          <a:noFill/>
-          <a:effectLst/>
-        </p:spPr>
-        <p:txBody>
-          <a:bodyPr wrap="square" lIns="27432" rIns="27432" tIns="18288" bIns="18288" anchor="ctr">
-            <a:spAutoFit/>
-          </a:bodyPr>
-          <a:lstStyle/>
-          <a:p>
-            <a:pPr algn="l">
-              <a:spcAft>
-                <a:spcPts val="0"/>
-              </a:spcAft>
-            </a:pPr>
-            <a:r>
-              <a:rPr sz="1150" b="0" i="0">
-                <a:solidFill>
-                  <a:srgbClr val="B4C7D2"/>
-                </a:solidFill>
-                <a:latin typeface="Arial"/>
-              </a:rPr>
-              <a:t>• r — radial coordinate</a:t>
-            </a:r>
-          </a:p>
-        </p:txBody>
-      </p:sp>
-      <p:sp>
-        <p:nvSpPr>
-          <p:cNvPr id="101" name="C4-E17 text 99" descr="sci-ppt:o099"/>
-          <p:cNvSpPr txBox="1"/>
-          <p:nvPr/>
-        </p:nvSpPr>
-        <p:spPr>
-          <a:xfrm>
-            <a:off x="6217920" y="4096512"/>
-            <a:ext cx="5715000" cy="246888"/>
-          </a:xfrm>
-          <a:prstGeom prst="rect">
-            <a:avLst/>
-          </a:prstGeom>
-          <a:noFill/>
-          <a:effectLst/>
-        </p:spPr>
-        <p:txBody>
-          <a:bodyPr wrap="square" lIns="27432" rIns="27432" tIns="18288" bIns="18288" anchor="ctr">
-            <a:spAutoFit/>
-          </a:bodyPr>
-          <a:lstStyle/>
-          <a:p>
-            <a:pPr algn="l">
-              <a:spcAft>
-                <a:spcPts val="0"/>
-              </a:spcAft>
-            </a:pPr>
-            <a:r>
-              <a:rPr sz="1150" b="0" i="0">
-                <a:solidFill>
-                  <a:srgbClr val="B4C7D2"/>
-                </a:solidFill>
-                <a:latin typeface="Arial"/>
-              </a:rPr>
-              <a:t>• b — crack edge</a:t>
-            </a:r>
-          </a:p>
-        </p:txBody>
-      </p:sp>
-      <p:sp>
-        <p:nvSpPr>
-          <p:cNvPr id="102" name="C4-E17 text 100" descr="sci-ppt:o100"/>
-          <p:cNvSpPr txBox="1"/>
-          <p:nvPr/>
-        </p:nvSpPr>
-        <p:spPr>
-          <a:xfrm>
-            <a:off x="320040" y="4329684"/>
-            <a:ext cx="5715000" cy="246888"/>
-          </a:xfrm>
-          <a:prstGeom prst="rect">
-            <a:avLst/>
-          </a:prstGeom>
-          <a:noFill/>
-          <a:effectLst/>
-        </p:spPr>
-        <p:txBody>
-          <a:bodyPr wrap="square" lIns="27432" rIns="27432" tIns="18288" bIns="18288" anchor="ctr">
-            <a:spAutoFit/>
-          </a:bodyPr>
-          <a:lstStyle/>
-          <a:p>
-            <a:pPr algn="l">
-              <a:spcAft>
-                <a:spcPts val="0"/>
-              </a:spcAft>
-            </a:pPr>
-            <a:r>
-              <a:rPr sz="1150" b="0" i="0">
-                <a:solidFill>
-                  <a:srgbClr val="B4C7D2"/>
-                </a:solidFill>
-                <a:latin typeface="Arial"/>
-              </a:rPr>
-              <a:t>• w, w′ — opening and slope</a:t>
-            </a:r>
-          </a:p>
-        </p:txBody>
-      </p:sp>
-      <p:sp>
-        <p:nvSpPr>
-          <p:cNvPr id="103" name="C4-E17 text 101" descr="sci-ppt:o101"/>
-          <p:cNvSpPr txBox="1"/>
-          <p:nvPr/>
-        </p:nvSpPr>
-        <p:spPr>
-          <a:xfrm>
-            <a:off x="6217920" y="4329684"/>
-            <a:ext cx="5715000" cy="246888"/>
-          </a:xfrm>
-          <a:prstGeom prst="rect">
-            <a:avLst/>
-          </a:prstGeom>
-          <a:noFill/>
-          <a:effectLst/>
-        </p:spPr>
-        <p:txBody>
-          <a:bodyPr wrap="square" lIns="27432" rIns="27432" tIns="18288" bIns="18288" anchor="ctr">
-            <a:spAutoFit/>
-          </a:bodyPr>
-          <a:lstStyle/>
-          <a:p>
-            <a:pPr algn="l">
-              <a:spcAft>
-                <a:spcPts val="0"/>
-              </a:spcAft>
-            </a:pPr>
-            <a:r>
-              <a:rPr sz="1150" b="0" i="0">
-                <a:solidFill>
-                  <a:srgbClr val="B4C7D2"/>
-                </a:solidFill>
-                <a:latin typeface="Arial"/>
-              </a:rPr>
-              <a:t>• D_f L_r²w = p₀ — equation residual</a:t>
-            </a:r>
-          </a:p>
-        </p:txBody>
-      </p:sp>
-      <p:sp>
-        <p:nvSpPr>
-          <p:cNvPr id="104" name="C4-E17 text 102" descr="sci-ppt:o102"/>
-          <p:cNvSpPr txBox="1"/>
-          <p:nvPr/>
-        </p:nvSpPr>
-        <p:spPr>
-          <a:xfrm>
-            <a:off x="320040" y="4562856"/>
-            <a:ext cx="5715000" cy="246888"/>
-          </a:xfrm>
-          <a:prstGeom prst="rect">
-            <a:avLst/>
-          </a:prstGeom>
-          <a:noFill/>
-          <a:effectLst/>
-        </p:spPr>
-        <p:txBody>
-          <a:bodyPr wrap="square" lIns="27432" rIns="27432" tIns="18288" bIns="18288" anchor="ctr">
-            <a:spAutoFit/>
-          </a:bodyPr>
-          <a:lstStyle/>
-          <a:p>
-            <a:pPr algn="l">
-              <a:spcAft>
-                <a:spcPts val="0"/>
-              </a:spcAft>
-            </a:pPr>
-            <a:r>
-              <a:rPr sz="1150" b="0" i="0">
-                <a:solidFill>
-                  <a:srgbClr val="B4C7D2"/>
-                </a:solidFill>
-                <a:latin typeface="Arial"/>
-              </a:rPr>
-              <a:t>• r = 0 and b → zero slope</a:t>
-            </a:r>
-          </a:p>
-        </p:txBody>
-      </p:sp>
-      <p:sp>
-        <p:nvSpPr>
-          <p:cNvPr id="105" name="C4-E17 text 103" descr="sci-ppt:o103"/>
-          <p:cNvSpPr txBox="1"/>
-          <p:nvPr/>
-        </p:nvSpPr>
-        <p:spPr>
-          <a:xfrm>
-            <a:off x="320040" y="5596128"/>
-            <a:ext cx="11430000" cy="292608"/>
-          </a:xfrm>
-          <a:prstGeom prst="rect">
-            <a:avLst/>
-          </a:prstGeom>
-          <a:noFill/>
-          <a:effectLst/>
-        </p:spPr>
-        <p:txBody>
-          <a:bodyPr wrap="square" lIns="27432" rIns="27432" tIns="18288" bIns="18288" anchor="ctr">
-            <a:spAutoFit/>
-          </a:bodyPr>
-          <a:lstStyle/>
-          <a:p>
-            <a:pPr algn="l">
-              <a:spcAft>
-                <a:spcPts val="0"/>
-              </a:spcAft>
-            </a:pPr>
-            <a:r>
-              <a:rPr sz="1150" b="0" i="0">
-                <a:solidFill>
-                  <a:srgbClr val="8EDBD4"/>
-                </a:solidFill>
-                <a:latin typeface="Arial"/>
-              </a:rPr>
-              <a:t>L_r r² = 4</a:t>
-            </a:r>
-          </a:p>
-        </p:txBody>
-      </p:sp>
-      <p:sp>
-        <p:nvSpPr>
-          <p:cNvPr id="106" name="C4-E17 text 104" descr="sci-ppt:o104"/>
-          <p:cNvSpPr txBox="1"/>
-          <p:nvPr/>
-        </p:nvSpPr>
-        <p:spPr>
-          <a:xfrm>
-            <a:off x="320040" y="5870448"/>
-            <a:ext cx="11430000" cy="292608"/>
-          </a:xfrm>
-          <a:prstGeom prst="rect">
-            <a:avLst/>
-          </a:prstGeom>
-          <a:noFill/>
-          <a:effectLst/>
-        </p:spPr>
-        <p:txBody>
-          <a:bodyPr wrap="square" lIns="27432" rIns="27432" tIns="18288" bIns="18288" anchor="ctr">
-            <a:spAutoFit/>
-          </a:bodyPr>
-          <a:lstStyle/>
-          <a:p>
-            <a:pPr algn="l">
-              <a:spcAft>
-                <a:spcPts val="0"/>
-              </a:spcAft>
-            </a:pPr>
-            <a:r>
-              <a:rPr sz="1150" b="0" i="0">
-                <a:solidFill>
-                  <a:srgbClr val="8EDBD4"/>
-                </a:solidFill>
-                <a:latin typeface="Arial"/>
-              </a:rPr>
-              <a:t>L_r r⁴ = 16r²</a:t>
-            </a:r>
-          </a:p>
-        </p:txBody>
-      </p:sp>
-      <p:sp>
-        <p:nvSpPr>
-          <p:cNvPr id="107" name="C4-E17 text 105" descr="sci-ppt:o105"/>
-          <p:cNvSpPr txBox="1"/>
-          <p:nvPr/>
-        </p:nvSpPr>
-        <p:spPr>
-          <a:xfrm>
-            <a:off x="320040" y="6473952"/>
-            <a:ext cx="11430000" cy="256032"/>
-          </a:xfrm>
-          <a:prstGeom prst="rect">
-            <a:avLst/>
-          </a:prstGeom>
-          <a:noFill/>
-          <a:effectLst/>
-        </p:spPr>
-        <p:txBody>
-          <a:bodyPr wrap="square" lIns="27432" rIns="27432" tIns="18288" bIns="18288" anchor="ctr">
+          <a:bodyPr wrap="none" lIns="18288" rIns="18288" tIns="18288" bIns="18288" anchor="t">
             <a:spAutoFit/>
           </a:bodyPr>
           <a:lstStyle/>
@@ -5731,7 +5863,7 @@
                 </a:solidFill>
                 <a:latin typeface="Arial"/>
               </a:rPr>
-              <a:t>Model schematic; geometry is not to scale.</a:t>
+              <a:t>Verification of Eq. C4-E17.</a:t>
             </a:r>
           </a:p>
         </p:txBody>
